--- a/Projet_4/Livrable/soutenance projet 4_mm .pptx
+++ b/Projet_4/Livrable/soutenance projet 4_mm .pptx
@@ -86,7 +86,7 @@
         <p:txBody>
           <a:bodyPr/>
           <a:p>
-            <a:fld id="{371E89EF-69F2-4A07-81E5-D4AFAF065AA4}" type="slidenum">
+            <a:fld id="{78C9CF79-0D5D-4CA7-8C5A-E53C7EE35C56}" type="slidenum">
               <a:t>&lt;#&gt;</a:t>
             </a:fld>
           </a:p>
@@ -295,7 +295,7 @@
         <p:txBody>
           <a:bodyPr/>
           <a:p>
-            <a:fld id="{B229A0F1-553D-4F68-B2CF-69DA910D7C87}" type="slidenum">
+            <a:fld id="{43746BFB-C877-4422-968A-0D1A629FD942}" type="slidenum">
               <a:t>&lt;#&gt;</a:t>
             </a:fld>
           </a:p>
@@ -590,7 +590,7 @@
         <p:txBody>
           <a:bodyPr/>
           <a:p>
-            <a:fld id="{2300D345-3F2D-4572-954C-468684652656}" type="slidenum">
+            <a:fld id="{0C68E14E-BBA1-4840-B543-9A2E8C4DE3F7}" type="slidenum">
               <a:t>&lt;#&gt;</a:t>
             </a:fld>
           </a:p>
@@ -971,7 +971,7 @@
         <p:txBody>
           <a:bodyPr/>
           <a:p>
-            <a:fld id="{DFFDCEFF-D651-4C86-BA8E-258CA072A755}" type="slidenum">
+            <a:fld id="{CE46223B-85E1-41C6-ACE1-33CF16C1CED0}" type="slidenum">
               <a:t>&lt;#&gt;</a:t>
             </a:fld>
           </a:p>
@@ -1054,7 +1054,7 @@
         <p:txBody>
           <a:bodyPr/>
           <a:p>
-            <a:fld id="{03385868-D9AA-41AE-9529-65BB136F4C5C}" type="slidenum">
+            <a:fld id="{9323E672-2A45-44B4-A08A-18EA5EBD63A9}" type="slidenum">
               <a:t>&lt;#&gt;</a:t>
             </a:fld>
           </a:p>
@@ -1217,7 +1217,7 @@
         <p:txBody>
           <a:bodyPr/>
           <a:p>
-            <a:fld id="{C933F3E4-9D05-475E-A99F-8FABF0193B15}" type="slidenum">
+            <a:fld id="{500BC207-17BE-485B-BADA-1B446127F137}" type="slidenum">
               <a:t>&lt;#&gt;</a:t>
             </a:fld>
           </a:p>
@@ -1383,7 +1383,7 @@
         <p:txBody>
           <a:bodyPr/>
           <a:p>
-            <a:fld id="{633C7D38-537C-4B87-AD56-1D93DA320712}" type="slidenum">
+            <a:fld id="{7DF44F59-40D7-4C41-A59C-10D831617350}" type="slidenum">
               <a:t>&lt;#&gt;</a:t>
             </a:fld>
           </a:p>
@@ -1592,7 +1592,7 @@
         <p:txBody>
           <a:bodyPr/>
           <a:p>
-            <a:fld id="{0129B88E-2860-4546-813A-251EC773AEA2}" type="slidenum">
+            <a:fld id="{2A582D0C-DE1D-48FB-85DA-E4DB9F51C449}" type="slidenum">
               <a:t>&lt;#&gt;</a:t>
             </a:fld>
           </a:p>
@@ -1715,7 +1715,7 @@
         <p:txBody>
           <a:bodyPr/>
           <a:p>
-            <a:fld id="{18EEC509-B937-4552-815C-DCE67B07085C}" type="slidenum">
+            <a:fld id="{87320410-27B1-4074-BCBB-753A470BB370}" type="slidenum">
               <a:t>&lt;#&gt;</a:t>
             </a:fld>
           </a:p>
@@ -1836,7 +1836,7 @@
         <p:txBody>
           <a:bodyPr/>
           <a:p>
-            <a:fld id="{74897C54-75BF-456B-964A-429B40E80F1A}" type="slidenum">
+            <a:fld id="{B5800F62-A506-4BAF-8537-8291B9D05A4D}" type="slidenum">
               <a:t>&lt;#&gt;</a:t>
             </a:fld>
           </a:p>
@@ -2088,7 +2088,7 @@
         <p:txBody>
           <a:bodyPr/>
           <a:p>
-            <a:fld id="{21AF6566-F1E2-41A1-B9AB-4A47AA6E0709}" type="slidenum">
+            <a:fld id="{2D10F0AE-2A2F-43EF-8FF9-CB2D0A05BBC8}" type="slidenum">
               <a:t>&lt;#&gt;</a:t>
             </a:fld>
           </a:p>
@@ -2251,7 +2251,7 @@
         <p:txBody>
           <a:bodyPr/>
           <a:p>
-            <a:fld id="{1BB32127-ADF4-464D-8C16-D6F350F98E5E}" type="slidenum">
+            <a:fld id="{7E100D76-872F-40D0-8B8D-FE4E086D2068}" type="slidenum">
               <a:t>&lt;#&gt;</a:t>
             </a:fld>
           </a:p>
@@ -2503,7 +2503,7 @@
         <p:txBody>
           <a:bodyPr/>
           <a:p>
-            <a:fld id="{A3C853B0-B4E5-447D-861E-C7AB7FEBF023}" type="slidenum">
+            <a:fld id="{E5C3DC06-650F-48A9-BB9C-BC414A817C65}" type="slidenum">
               <a:t>&lt;#&gt;</a:t>
             </a:fld>
           </a:p>
@@ -2755,7 +2755,7 @@
         <p:txBody>
           <a:bodyPr/>
           <a:p>
-            <a:fld id="{4CE5456D-66D6-4617-82F1-6BFA7D782873}" type="slidenum">
+            <a:fld id="{537D0571-53C7-4716-8686-99B2A74843BC}" type="slidenum">
               <a:t>&lt;#&gt;</a:t>
             </a:fld>
           </a:p>
@@ -2964,7 +2964,7 @@
         <p:txBody>
           <a:bodyPr/>
           <a:p>
-            <a:fld id="{FA426EBD-4208-4FCC-8720-D89E74680C23}" type="slidenum">
+            <a:fld id="{D1EA6560-B3A0-46E8-9CC7-0A84135D3193}" type="slidenum">
               <a:t>&lt;#&gt;</a:t>
             </a:fld>
           </a:p>
@@ -3259,7 +3259,7 @@
         <p:txBody>
           <a:bodyPr/>
           <a:p>
-            <a:fld id="{7F7CD061-5311-4B88-BDFA-741504FB0882}" type="slidenum">
+            <a:fld id="{BDDCD32F-7600-419D-9175-061572CB7F0B}" type="slidenum">
               <a:t>&lt;#&gt;</a:t>
             </a:fld>
           </a:p>
@@ -3640,7 +3640,7 @@
         <p:txBody>
           <a:bodyPr/>
           <a:p>
-            <a:fld id="{A058FD0A-65AE-43A6-B872-02906B722FF4}" type="slidenum">
+            <a:fld id="{6DCE9359-9390-4B74-9242-6F516CD9A04E}" type="slidenum">
               <a:t>&lt;#&gt;</a:t>
             </a:fld>
           </a:p>
@@ -3723,7 +3723,7 @@
         <p:txBody>
           <a:bodyPr/>
           <a:p>
-            <a:fld id="{2312ED8E-50F9-4C68-AA7A-1C2EAC2B626A}" type="slidenum">
+            <a:fld id="{B152F809-8AEE-4441-B47D-DEC6116815AD}" type="slidenum">
               <a:t>&lt;#&gt;</a:t>
             </a:fld>
           </a:p>
@@ -3886,7 +3886,7 @@
         <p:txBody>
           <a:bodyPr/>
           <a:p>
-            <a:fld id="{25455CFF-C02A-46E0-9311-330DE2394823}" type="slidenum">
+            <a:fld id="{5A392F70-74B6-4D0F-9E50-D937575605EC}" type="slidenum">
               <a:t>&lt;#&gt;</a:t>
             </a:fld>
           </a:p>
@@ -4052,7 +4052,7 @@
         <p:txBody>
           <a:bodyPr/>
           <a:p>
-            <a:fld id="{D9FB84D8-635C-433D-A8AC-4ED34A380325}" type="slidenum">
+            <a:fld id="{3F84A65C-623E-411E-9E4C-90C0AEC75253}" type="slidenum">
               <a:t>&lt;#&gt;</a:t>
             </a:fld>
           </a:p>
@@ -4261,7 +4261,7 @@
         <p:txBody>
           <a:bodyPr/>
           <a:p>
-            <a:fld id="{FCFCBE6F-C2D1-47EC-95DD-F7FBBF8F7837}" type="slidenum">
+            <a:fld id="{827625C1-2546-40CC-BAD5-6E22DB0B7558}" type="slidenum">
               <a:t>&lt;#&gt;</a:t>
             </a:fld>
           </a:p>
@@ -4384,7 +4384,7 @@
         <p:txBody>
           <a:bodyPr/>
           <a:p>
-            <a:fld id="{0A6E58DB-79BE-4495-87F3-18379CAD55F1}" type="slidenum">
+            <a:fld id="{62B9B0E6-C7C2-4A05-9A2C-DA322CD7A795}" type="slidenum">
               <a:t>&lt;#&gt;</a:t>
             </a:fld>
           </a:p>
@@ -4550,7 +4550,7 @@
         <p:txBody>
           <a:bodyPr/>
           <a:p>
-            <a:fld id="{D0C2A8FE-6640-42AC-AE6E-F8A2FDDC4C9C}" type="slidenum">
+            <a:fld id="{D9863892-6380-45B4-AAE1-7C71309A1B88}" type="slidenum">
               <a:t>&lt;#&gt;</a:t>
             </a:fld>
           </a:p>
@@ -4671,7 +4671,7 @@
         <p:txBody>
           <a:bodyPr/>
           <a:p>
-            <a:fld id="{F8D213B1-62D1-425B-BFFB-06A37E919A77}" type="slidenum">
+            <a:fld id="{5D13A370-22B6-4AF9-8552-9A22E7478144}" type="slidenum">
               <a:t>&lt;#&gt;</a:t>
             </a:fld>
           </a:p>
@@ -4923,7 +4923,7 @@
         <p:txBody>
           <a:bodyPr/>
           <a:p>
-            <a:fld id="{DE3AA011-9997-462D-8C96-50AAFCDE9D4F}" type="slidenum">
+            <a:fld id="{6800A780-CB3B-4E1B-BC69-3910919AC6F1}" type="slidenum">
               <a:t>&lt;#&gt;</a:t>
             </a:fld>
           </a:p>
@@ -5175,7 +5175,7 @@
         <p:txBody>
           <a:bodyPr/>
           <a:p>
-            <a:fld id="{EA028379-F949-48D0-ABA4-39840375A256}" type="slidenum">
+            <a:fld id="{F6929842-25A9-4726-A002-6DD6A34C7BE3}" type="slidenum">
               <a:t>&lt;#&gt;</a:t>
             </a:fld>
           </a:p>
@@ -5427,7 +5427,7 @@
         <p:txBody>
           <a:bodyPr/>
           <a:p>
-            <a:fld id="{0F2C05D0-C2FB-4278-853C-EBD5ACE598E6}" type="slidenum">
+            <a:fld id="{7CC63861-2533-47C7-8251-7031DE82EC52}" type="slidenum">
               <a:t>&lt;#&gt;</a:t>
             </a:fld>
           </a:p>
@@ -5636,7 +5636,7 @@
         <p:txBody>
           <a:bodyPr/>
           <a:p>
-            <a:fld id="{89FDDB0F-103F-4426-85B9-CB7A1A223BC0}" type="slidenum">
+            <a:fld id="{BB75FC51-5617-464D-964F-C2A10BA19A04}" type="slidenum">
               <a:t>&lt;#&gt;</a:t>
             </a:fld>
           </a:p>
@@ -5931,7 +5931,7 @@
         <p:txBody>
           <a:bodyPr/>
           <a:p>
-            <a:fld id="{CE37C3D3-8A3C-4691-BE32-BEE7C8A00BDD}" type="slidenum">
+            <a:fld id="{18418BA5-DA4A-4AA0-ACC4-08FBE1557A8C}" type="slidenum">
               <a:t>&lt;#&gt;</a:t>
             </a:fld>
           </a:p>
@@ -6312,7 +6312,7 @@
         <p:txBody>
           <a:bodyPr/>
           <a:p>
-            <a:fld id="{16F12FE0-0110-44FB-A57C-A13F3029B60D}" type="slidenum">
+            <a:fld id="{E785150F-CFB6-4A73-865E-5A2433666352}" type="slidenum">
               <a:t>&lt;#&gt;</a:t>
             </a:fld>
           </a:p>
@@ -6395,7 +6395,7 @@
         <p:txBody>
           <a:bodyPr/>
           <a:p>
-            <a:fld id="{2164020D-29E5-4AC4-88B4-2073FC116214}" type="slidenum">
+            <a:fld id="{2C40A16B-7393-4DAA-AC47-7EEDFF287878}" type="slidenum">
               <a:t>&lt;#&gt;</a:t>
             </a:fld>
           </a:p>
@@ -6558,7 +6558,7 @@
         <p:txBody>
           <a:bodyPr/>
           <a:p>
-            <a:fld id="{768AD10D-7057-429A-B102-AB24D84EFCE3}" type="slidenum">
+            <a:fld id="{27964B5B-2AE9-40A3-9766-61BBE3CA894D}" type="slidenum">
               <a:t>&lt;#&gt;</a:t>
             </a:fld>
           </a:p>
@@ -6724,7 +6724,7 @@
         <p:txBody>
           <a:bodyPr/>
           <a:p>
-            <a:fld id="{0583B014-9371-4F28-B1C9-5415209C754D}" type="slidenum">
+            <a:fld id="{F4A66D5F-5319-47C5-836A-FEF1A531053F}" type="slidenum">
               <a:t>&lt;#&gt;</a:t>
             </a:fld>
           </a:p>
@@ -6933,7 +6933,7 @@
         <p:txBody>
           <a:bodyPr/>
           <a:p>
-            <a:fld id="{F5859E8B-D2DB-4670-B47A-9F5A6AC6FF45}" type="slidenum">
+            <a:fld id="{6049C0E4-68BA-40D6-B594-0A6883E44762}" type="slidenum">
               <a:t>&lt;#&gt;</a:t>
             </a:fld>
           </a:p>
@@ -7142,7 +7142,7 @@
         <p:txBody>
           <a:bodyPr/>
           <a:p>
-            <a:fld id="{B67E6778-7B59-44F9-83CF-0C7FD1E88C38}" type="slidenum">
+            <a:fld id="{67E58DB5-3B8C-4E8F-B61D-B47A1C463912}" type="slidenum">
               <a:t>&lt;#&gt;</a:t>
             </a:fld>
           </a:p>
@@ -7265,7 +7265,7 @@
         <p:txBody>
           <a:bodyPr/>
           <a:p>
-            <a:fld id="{68289C40-7000-47A7-8A6B-969715C6E545}" type="slidenum">
+            <a:fld id="{91CDFC1D-5994-4E6A-AE70-134C5C3F8164}" type="slidenum">
               <a:t>&lt;#&gt;</a:t>
             </a:fld>
           </a:p>
@@ -7386,7 +7386,7 @@
         <p:txBody>
           <a:bodyPr/>
           <a:p>
-            <a:fld id="{C5A564A3-8A1C-472E-A058-4DD54B4ADA6A}" type="slidenum">
+            <a:fld id="{130DAD40-C03D-42A6-BE57-C0E96D2AF294}" type="slidenum">
               <a:t>&lt;#&gt;</a:t>
             </a:fld>
           </a:p>
@@ -7638,7 +7638,7 @@
         <p:txBody>
           <a:bodyPr/>
           <a:p>
-            <a:fld id="{3B2636ED-20E2-4A17-8753-FE29E394D6DC}" type="slidenum">
+            <a:fld id="{AAA26CB1-7196-454F-B40A-0D7C60A110E5}" type="slidenum">
               <a:t>&lt;#&gt;</a:t>
             </a:fld>
           </a:p>
@@ -7890,7 +7890,7 @@
         <p:txBody>
           <a:bodyPr/>
           <a:p>
-            <a:fld id="{E210402E-E270-4236-B053-4CBF6532244E}" type="slidenum">
+            <a:fld id="{1AF70929-7B6D-4F30-BA87-9380A00F8A2C}" type="slidenum">
               <a:t>&lt;#&gt;</a:t>
             </a:fld>
           </a:p>
@@ -8142,7 +8142,7 @@
         <p:txBody>
           <a:bodyPr/>
           <a:p>
-            <a:fld id="{C04549DA-5192-414E-A8DD-8AF62B61A2C9}" type="slidenum">
+            <a:fld id="{CEA256EC-01E2-4D8B-859A-71CBFE8A3E84}" type="slidenum">
               <a:t>&lt;#&gt;</a:t>
             </a:fld>
           </a:p>
@@ -8351,7 +8351,7 @@
         <p:txBody>
           <a:bodyPr/>
           <a:p>
-            <a:fld id="{A3452B42-5C12-4A00-B8CF-3B3B4B08BFF7}" type="slidenum">
+            <a:fld id="{EC6ADFD4-23C7-49CD-B28C-0918A1E345C1}" type="slidenum">
               <a:t>&lt;#&gt;</a:t>
             </a:fld>
           </a:p>
@@ -8646,7 +8646,7 @@
         <p:txBody>
           <a:bodyPr/>
           <a:p>
-            <a:fld id="{2313A861-79B5-4F98-B378-848EDA4784DB}" type="slidenum">
+            <a:fld id="{016B7DDD-5A86-47FD-BC88-AC66BDF16835}" type="slidenum">
               <a:t>&lt;#&gt;</a:t>
             </a:fld>
           </a:p>
@@ -9027,7 +9027,7 @@
         <p:txBody>
           <a:bodyPr/>
           <a:p>
-            <a:fld id="{4E5C5CCF-C9DC-4FB7-9632-485D05C0B743}" type="slidenum">
+            <a:fld id="{D52D60D9-DD5E-4FC2-A467-807616D53A19}" type="slidenum">
               <a:t>&lt;#&gt;</a:t>
             </a:fld>
           </a:p>
@@ -9150,7 +9150,7 @@
         <p:txBody>
           <a:bodyPr/>
           <a:p>
-            <a:fld id="{C60A42B5-2881-4954-A7A4-EE0A82239C2F}" type="slidenum">
+            <a:fld id="{9B3E88CB-B7DB-42E7-93A7-21D16C0E35F9}" type="slidenum">
               <a:t>&lt;#&gt;</a:t>
             </a:fld>
           </a:p>
@@ -9271,7 +9271,7 @@
         <p:txBody>
           <a:bodyPr/>
           <a:p>
-            <a:fld id="{89F893FB-D232-4E9D-9897-761C7AC4D02D}" type="slidenum">
+            <a:fld id="{5E521295-6008-453B-9E45-25433E74D936}" type="slidenum">
               <a:t>&lt;#&gt;</a:t>
             </a:fld>
           </a:p>
@@ -9523,7 +9523,7 @@
         <p:txBody>
           <a:bodyPr/>
           <a:p>
-            <a:fld id="{3D5C4AB0-91C6-412F-815D-F5C1D3D4E44E}" type="slidenum">
+            <a:fld id="{08907309-A27D-401E-9FC5-0A0FF52C3C88}" type="slidenum">
               <a:t>&lt;#&gt;</a:t>
             </a:fld>
           </a:p>
@@ -9775,7 +9775,7 @@
         <p:txBody>
           <a:bodyPr/>
           <a:p>
-            <a:fld id="{D20E9C57-0E67-49E9-9FA4-68E0F4EB0EA3}" type="slidenum">
+            <a:fld id="{6D949F2A-2438-489D-AE02-52DE44A60B70}" type="slidenum">
               <a:t>&lt;#&gt;</a:t>
             </a:fld>
           </a:p>
@@ -10027,7 +10027,7 @@
         <p:txBody>
           <a:bodyPr/>
           <a:p>
-            <a:fld id="{65E7253C-967F-4C4F-B3CA-E9694EBE6725}" type="slidenum">
+            <a:fld id="{8A27C8A9-3889-4528-B088-4F1F882D627C}" type="slidenum">
               <a:t>&lt;#&gt;</a:t>
             </a:fld>
           </a:p>
@@ -10092,15 +10092,15 @@
         <p:spPr>
           <a:xfrm>
             <a:off x="0" y="0"/>
-            <a:ext cx="9142200" cy="303120"/>
+            <a:ext cx="9141840" cy="302760"/>
           </a:xfrm>
           <a:custGeom>
             <a:avLst/>
             <a:gdLst>
-              <a:gd name="textAreaLeft" fmla="*/ 0 w 9142200"/>
-              <a:gd name="textAreaRight" fmla="*/ 9144000 w 9142200"/>
-              <a:gd name="textAreaTop" fmla="*/ 0 h 303120"/>
-              <a:gd name="textAreaBottom" fmla="*/ 304920 h 303120"/>
+              <a:gd name="textAreaLeft" fmla="*/ 0 w 9141840"/>
+              <a:gd name="textAreaRight" fmla="*/ 9144000 w 9141840"/>
+              <a:gd name="textAreaTop" fmla="*/ 0 h 302760"/>
+              <a:gd name="textAreaBottom" fmla="*/ 304920 h 302760"/>
             </a:gdLst>
             <a:ahLst/>
             <a:rect l="textAreaLeft" t="textAreaTop" r="textAreaRight" b="textAreaBottom"/>
@@ -10167,15 +10167,15 @@
         <p:spPr>
           <a:xfrm>
             <a:off x="0" y="0"/>
-            <a:ext cx="9142200" cy="303120"/>
+            <a:ext cx="9141840" cy="302760"/>
           </a:xfrm>
           <a:custGeom>
             <a:avLst/>
             <a:gdLst>
-              <a:gd name="textAreaLeft" fmla="*/ 0 w 9142200"/>
-              <a:gd name="textAreaRight" fmla="*/ 9144000 w 9142200"/>
-              <a:gd name="textAreaTop" fmla="*/ 0 h 303120"/>
-              <a:gd name="textAreaBottom" fmla="*/ 304920 h 303120"/>
+              <a:gd name="textAreaLeft" fmla="*/ 0 w 9141840"/>
+              <a:gd name="textAreaRight" fmla="*/ 9144000 w 9141840"/>
+              <a:gd name="textAreaTop" fmla="*/ 0 h 302760"/>
+              <a:gd name="textAreaBottom" fmla="*/ 304920 h 302760"/>
             </a:gdLst>
             <a:ahLst/>
             <a:rect l="textAreaLeft" t="textAreaTop" r="textAreaRight" b="textAreaBottom"/>
@@ -10242,15 +10242,15 @@
         <p:spPr>
           <a:xfrm>
             <a:off x="685800" y="2832120"/>
-            <a:ext cx="7846920" cy="360"/>
+            <a:ext cx="7846560" cy="360"/>
           </a:xfrm>
           <a:custGeom>
             <a:avLst/>
             <a:gdLst>
-              <a:gd name="textAreaLeft" fmla="*/ 0 w 7846920"/>
-              <a:gd name="textAreaRight" fmla="*/ 7848720 w 7846920"/>
+              <a:gd name="textAreaLeft" fmla="*/ 0 w 7846560"/>
+              <a:gd name="textAreaRight" fmla="*/ 7848720 w 7846560"/>
               <a:gd name="textAreaTop" fmla="*/ 0 h 360"/>
-              <a:gd name="textAreaBottom" fmla="*/ 5760 h 360"/>
+              <a:gd name="textAreaBottom" fmla="*/ 11520 h 360"/>
             </a:gdLst>
             <a:ahLst/>
             <a:rect l="textAreaLeft" t="textAreaTop" r="textAreaRight" b="textAreaBottom"/>
@@ -10312,7 +10312,7 @@
         <p:spPr>
           <a:xfrm>
             <a:off x="3108960" y="5315040"/>
-            <a:ext cx="2924280" cy="284040"/>
+            <a:ext cx="2923920" cy="283680"/>
           </a:xfrm>
           <a:prstGeom prst="rect">
             <a:avLst/>
@@ -10384,7 +10384,7 @@
         <p:spPr>
           <a:xfrm>
             <a:off x="6583680" y="5315040"/>
-            <a:ext cx="2101320" cy="284040"/>
+            <a:ext cx="2100960" cy="283680"/>
           </a:xfrm>
           <a:prstGeom prst="rect">
             <a:avLst/>
@@ -10425,7 +10425,7 @@
                 <a:tab algn="l" pos="0"/>
               </a:tabLst>
             </a:pPr>
-            <a:fld id="{837C898E-570D-4BB6-82F1-ED60890C9AAB}" type="slidenum">
+            <a:fld id="{1686E5FD-7D05-45C0-BD7B-468BB7C4CD7A}" type="slidenum">
               <a:rPr b="0" lang="fr-FR" sz="1400" spc="-1" strike="noStrike">
                 <a:solidFill>
                   <a:srgbClr val="b2b2b2"/>
@@ -10456,7 +10456,7 @@
         <p:spPr>
           <a:xfrm>
             <a:off x="457200" y="5315040"/>
-            <a:ext cx="2101320" cy="284040"/>
+            <a:ext cx="2100960" cy="283680"/>
           </a:xfrm>
           <a:prstGeom prst="rect">
             <a:avLst/>
@@ -10830,15 +10830,15 @@
         <p:spPr>
           <a:xfrm>
             <a:off x="0" y="0"/>
-            <a:ext cx="9142200" cy="303120"/>
+            <a:ext cx="9141840" cy="302760"/>
           </a:xfrm>
           <a:custGeom>
             <a:avLst/>
             <a:gdLst>
-              <a:gd name="textAreaLeft" fmla="*/ 0 w 9142200"/>
-              <a:gd name="textAreaRight" fmla="*/ 9144000 w 9142200"/>
-              <a:gd name="textAreaTop" fmla="*/ 0 h 303120"/>
-              <a:gd name="textAreaBottom" fmla="*/ 304920 h 303120"/>
+              <a:gd name="textAreaLeft" fmla="*/ 0 w 9141840"/>
+              <a:gd name="textAreaRight" fmla="*/ 9144000 w 9141840"/>
+              <a:gd name="textAreaTop" fmla="*/ 0 h 302760"/>
+              <a:gd name="textAreaBottom" fmla="*/ 304920 h 302760"/>
             </a:gdLst>
             <a:ahLst/>
             <a:rect l="textAreaLeft" t="textAreaTop" r="textAreaRight" b="textAreaBottom"/>
@@ -10909,7 +10909,7 @@
         <p:spPr>
           <a:xfrm>
             <a:off x="3108960" y="5315040"/>
-            <a:ext cx="2924280" cy="284040"/>
+            <a:ext cx="2923920" cy="283680"/>
           </a:xfrm>
           <a:prstGeom prst="rect">
             <a:avLst/>
@@ -10981,7 +10981,7 @@
         <p:spPr>
           <a:xfrm>
             <a:off x="6583680" y="5315040"/>
-            <a:ext cx="2101320" cy="284040"/>
+            <a:ext cx="2100960" cy="283680"/>
           </a:xfrm>
           <a:prstGeom prst="rect">
             <a:avLst/>
@@ -11022,7 +11022,7 @@
                 <a:tab algn="l" pos="0"/>
               </a:tabLst>
             </a:pPr>
-            <a:fld id="{018D9C8E-75D8-4D8B-8324-F0B9A061F819}" type="slidenum">
+            <a:fld id="{DBD3AF07-C4EB-461B-A1D0-17692E4ECE10}" type="slidenum">
               <a:rPr b="0" lang="fr-FR" sz="1400" spc="-1" strike="noStrike">
                 <a:solidFill>
                   <a:srgbClr val="b2b2b2"/>
@@ -11053,7 +11053,7 @@
         <p:spPr>
           <a:xfrm>
             <a:off x="457200" y="5315040"/>
-            <a:ext cx="2101320" cy="284040"/>
+            <a:ext cx="2100960" cy="283680"/>
           </a:xfrm>
           <a:prstGeom prst="rect">
             <a:avLst/>
@@ -11427,15 +11427,15 @@
         <p:spPr>
           <a:xfrm>
             <a:off x="0" y="0"/>
-            <a:ext cx="9142200" cy="303120"/>
+            <a:ext cx="9141840" cy="302760"/>
           </a:xfrm>
           <a:custGeom>
             <a:avLst/>
             <a:gdLst>
-              <a:gd name="textAreaLeft" fmla="*/ 0 w 9142200"/>
-              <a:gd name="textAreaRight" fmla="*/ 9144000 w 9142200"/>
-              <a:gd name="textAreaTop" fmla="*/ 0 h 303120"/>
-              <a:gd name="textAreaBottom" fmla="*/ 304920 h 303120"/>
+              <a:gd name="textAreaLeft" fmla="*/ 0 w 9141840"/>
+              <a:gd name="textAreaRight" fmla="*/ 9144000 w 9141840"/>
+              <a:gd name="textAreaTop" fmla="*/ 0 h 302760"/>
+              <a:gd name="textAreaBottom" fmla="*/ 304920 h 302760"/>
             </a:gdLst>
             <a:ahLst/>
             <a:rect l="textAreaLeft" t="textAreaTop" r="textAreaRight" b="textAreaBottom"/>
@@ -11502,15 +11502,15 @@
         <p:spPr>
           <a:xfrm>
             <a:off x="0" y="374400"/>
-            <a:ext cx="9142200" cy="5339160"/>
+            <a:ext cx="9141840" cy="5338800"/>
           </a:xfrm>
           <a:custGeom>
             <a:avLst/>
             <a:gdLst>
-              <a:gd name="textAreaLeft" fmla="*/ 0 w 9142200"/>
-              <a:gd name="textAreaRight" fmla="*/ 9144000 w 9142200"/>
-              <a:gd name="textAreaTop" fmla="*/ 0 h 5339160"/>
-              <a:gd name="textAreaBottom" fmla="*/ 5340960 h 5339160"/>
+              <a:gd name="textAreaLeft" fmla="*/ 0 w 9141840"/>
+              <a:gd name="textAreaRight" fmla="*/ 9144000 w 9141840"/>
+              <a:gd name="textAreaTop" fmla="*/ 0 h 5338800"/>
+              <a:gd name="textAreaBottom" fmla="*/ 5340960 h 5338800"/>
             </a:gdLst>
             <a:ahLst/>
             <a:rect l="textAreaLeft" t="textAreaTop" r="textAreaRight" b="textAreaBottom"/>
@@ -11577,15 +11577,15 @@
         <p:spPr>
           <a:xfrm>
             <a:off x="0" y="304920"/>
-            <a:ext cx="9142200" cy="68040"/>
+            <a:ext cx="9141840" cy="67680"/>
           </a:xfrm>
           <a:custGeom>
             <a:avLst/>
             <a:gdLst>
-              <a:gd name="textAreaLeft" fmla="*/ 0 w 9142200"/>
-              <a:gd name="textAreaRight" fmla="*/ 9144000 w 9142200"/>
-              <a:gd name="textAreaTop" fmla="*/ 0 h 68040"/>
-              <a:gd name="textAreaBottom" fmla="*/ 69840 h 68040"/>
+              <a:gd name="textAreaLeft" fmla="*/ 0 w 9141840"/>
+              <a:gd name="textAreaRight" fmla="*/ 9144000 w 9141840"/>
+              <a:gd name="textAreaTop" fmla="*/ 0 h 67680"/>
+              <a:gd name="textAreaBottom" fmla="*/ 69840 h 67680"/>
             </a:gdLst>
             <a:ahLst/>
             <a:rect l="textAreaLeft" t="textAreaTop" r="textAreaRight" b="textAreaBottom"/>
@@ -11652,15 +11652,15 @@
         <p:spPr>
           <a:xfrm>
             <a:off x="0" y="0"/>
-            <a:ext cx="9142200" cy="303120"/>
+            <a:ext cx="9141840" cy="302760"/>
           </a:xfrm>
           <a:custGeom>
             <a:avLst/>
             <a:gdLst>
-              <a:gd name="textAreaLeft" fmla="*/ 0 w 9142200"/>
-              <a:gd name="textAreaRight" fmla="*/ 9144000 w 9142200"/>
-              <a:gd name="textAreaTop" fmla="*/ 0 h 303120"/>
-              <a:gd name="textAreaBottom" fmla="*/ 304920 h 303120"/>
+              <a:gd name="textAreaLeft" fmla="*/ 0 w 9141840"/>
+              <a:gd name="textAreaRight" fmla="*/ 9144000 w 9141840"/>
+              <a:gd name="textAreaTop" fmla="*/ 0 h 302760"/>
+              <a:gd name="textAreaBottom" fmla="*/ 304920 h 302760"/>
             </a:gdLst>
             <a:ahLst/>
             <a:rect l="textAreaLeft" t="textAreaTop" r="textAreaRight" b="textAreaBottom"/>
@@ -11727,15 +11727,15 @@
         <p:spPr>
           <a:xfrm>
             <a:off x="731520" y="3832920"/>
-            <a:ext cx="7846920" cy="360"/>
+            <a:ext cx="7846560" cy="360"/>
           </a:xfrm>
           <a:custGeom>
             <a:avLst/>
             <a:gdLst>
-              <a:gd name="textAreaLeft" fmla="*/ 0 w 7846920"/>
-              <a:gd name="textAreaRight" fmla="*/ 7848720 w 7846920"/>
+              <a:gd name="textAreaLeft" fmla="*/ 0 w 7846560"/>
+              <a:gd name="textAreaRight" fmla="*/ 7848720 w 7846560"/>
               <a:gd name="textAreaTop" fmla="*/ 0 h 360"/>
-              <a:gd name="textAreaBottom" fmla="*/ 5760 h 360"/>
+              <a:gd name="textAreaBottom" fmla="*/ 11520 h 360"/>
             </a:gdLst>
             <a:ahLst/>
             <a:rect l="textAreaLeft" t="textAreaTop" r="textAreaRight" b="textAreaBottom"/>
@@ -11797,7 +11797,7 @@
         <p:spPr>
           <a:xfrm>
             <a:off x="3108960" y="5315040"/>
-            <a:ext cx="2924280" cy="284040"/>
+            <a:ext cx="2923920" cy="283680"/>
           </a:xfrm>
           <a:prstGeom prst="rect">
             <a:avLst/>
@@ -11869,7 +11869,7 @@
         <p:spPr>
           <a:xfrm>
             <a:off x="6583680" y="5315040"/>
-            <a:ext cx="2101320" cy="284040"/>
+            <a:ext cx="2100960" cy="283680"/>
           </a:xfrm>
           <a:prstGeom prst="rect">
             <a:avLst/>
@@ -11910,7 +11910,7 @@
                 <a:tab algn="l" pos="0"/>
               </a:tabLst>
             </a:pPr>
-            <a:fld id="{72DF60F7-1A2D-49AD-A7C8-EFE7A315F8AC}" type="slidenum">
+            <a:fld id="{0B98613C-96FE-4830-8A47-82BF22C1C350}" type="slidenum">
               <a:rPr b="0" lang="fr-FR" sz="1400" spc="-1" strike="noStrike">
                 <a:solidFill>
                   <a:srgbClr val="b2b2b2"/>
@@ -11941,7 +11941,7 @@
         <p:spPr>
           <a:xfrm>
             <a:off x="457200" y="5315040"/>
-            <a:ext cx="2101320" cy="284040"/>
+            <a:ext cx="2100960" cy="283680"/>
           </a:xfrm>
           <a:prstGeom prst="rect">
             <a:avLst/>
@@ -12315,15 +12315,15 @@
         <p:spPr>
           <a:xfrm>
             <a:off x="0" y="0"/>
-            <a:ext cx="9142200" cy="303120"/>
+            <a:ext cx="9141840" cy="302760"/>
           </a:xfrm>
           <a:custGeom>
             <a:avLst/>
             <a:gdLst>
-              <a:gd name="textAreaLeft" fmla="*/ 0 w 9142200"/>
-              <a:gd name="textAreaRight" fmla="*/ 9144000 w 9142200"/>
-              <a:gd name="textAreaTop" fmla="*/ 0 h 303120"/>
-              <a:gd name="textAreaBottom" fmla="*/ 304920 h 303120"/>
+              <a:gd name="textAreaLeft" fmla="*/ 0 w 9141840"/>
+              <a:gd name="textAreaRight" fmla="*/ 9144000 w 9141840"/>
+              <a:gd name="textAreaTop" fmla="*/ 0 h 302760"/>
+              <a:gd name="textAreaBottom" fmla="*/ 304920 h 302760"/>
             </a:gdLst>
             <a:ahLst/>
             <a:rect l="textAreaLeft" t="textAreaTop" r="textAreaRight" b="textAreaBottom"/>
@@ -12390,15 +12390,15 @@
         <p:spPr>
           <a:xfrm>
             <a:off x="0" y="374400"/>
-            <a:ext cx="9142200" cy="5339160"/>
+            <a:ext cx="9141840" cy="5338800"/>
           </a:xfrm>
           <a:custGeom>
             <a:avLst/>
             <a:gdLst>
-              <a:gd name="textAreaLeft" fmla="*/ 0 w 9142200"/>
-              <a:gd name="textAreaRight" fmla="*/ 9144000 w 9142200"/>
-              <a:gd name="textAreaTop" fmla="*/ 0 h 5339160"/>
-              <a:gd name="textAreaBottom" fmla="*/ 5340960 h 5339160"/>
+              <a:gd name="textAreaLeft" fmla="*/ 0 w 9141840"/>
+              <a:gd name="textAreaRight" fmla="*/ 9144000 w 9141840"/>
+              <a:gd name="textAreaTop" fmla="*/ 0 h 5338800"/>
+              <a:gd name="textAreaBottom" fmla="*/ 5340960 h 5338800"/>
             </a:gdLst>
             <a:ahLst/>
             <a:rect l="textAreaLeft" t="textAreaTop" r="textAreaRight" b="textAreaBottom"/>
@@ -12465,15 +12465,15 @@
         <p:spPr>
           <a:xfrm>
             <a:off x="0" y="304920"/>
-            <a:ext cx="9142200" cy="68040"/>
+            <a:ext cx="9141840" cy="67680"/>
           </a:xfrm>
           <a:custGeom>
             <a:avLst/>
             <a:gdLst>
-              <a:gd name="textAreaLeft" fmla="*/ 0 w 9142200"/>
-              <a:gd name="textAreaRight" fmla="*/ 9144000 w 9142200"/>
-              <a:gd name="textAreaTop" fmla="*/ 0 h 68040"/>
-              <a:gd name="textAreaBottom" fmla="*/ 69840 h 68040"/>
+              <a:gd name="textAreaLeft" fmla="*/ 0 w 9141840"/>
+              <a:gd name="textAreaRight" fmla="*/ 9144000 w 9141840"/>
+              <a:gd name="textAreaTop" fmla="*/ 0 h 67680"/>
+              <a:gd name="textAreaBottom" fmla="*/ 69840 h 67680"/>
             </a:gdLst>
             <a:ahLst/>
             <a:rect l="textAreaLeft" t="textAreaTop" r="textAreaRight" b="textAreaBottom"/>
@@ -12540,15 +12540,15 @@
         <p:spPr>
           <a:xfrm>
             <a:off x="0" y="0"/>
-            <a:ext cx="9142200" cy="303120"/>
+            <a:ext cx="9141840" cy="302760"/>
           </a:xfrm>
           <a:custGeom>
             <a:avLst/>
             <a:gdLst>
-              <a:gd name="textAreaLeft" fmla="*/ 0 w 9142200"/>
-              <a:gd name="textAreaRight" fmla="*/ 9144000 w 9142200"/>
-              <a:gd name="textAreaTop" fmla="*/ 0 h 303120"/>
-              <a:gd name="textAreaBottom" fmla="*/ 304920 h 303120"/>
+              <a:gd name="textAreaLeft" fmla="*/ 0 w 9141840"/>
+              <a:gd name="textAreaRight" fmla="*/ 9144000 w 9141840"/>
+              <a:gd name="textAreaTop" fmla="*/ 0 h 302760"/>
+              <a:gd name="textAreaBottom" fmla="*/ 304920 h 302760"/>
             </a:gdLst>
             <a:ahLst/>
             <a:rect l="textAreaLeft" t="textAreaTop" r="textAreaRight" b="textAreaBottom"/>
@@ -12615,15 +12615,15 @@
         <p:spPr>
           <a:xfrm>
             <a:off x="731520" y="3832920"/>
-            <a:ext cx="7846920" cy="360"/>
+            <a:ext cx="7846560" cy="360"/>
           </a:xfrm>
           <a:custGeom>
             <a:avLst/>
             <a:gdLst>
-              <a:gd name="textAreaLeft" fmla="*/ 0 w 7846920"/>
-              <a:gd name="textAreaRight" fmla="*/ 7848720 w 7846920"/>
+              <a:gd name="textAreaLeft" fmla="*/ 0 w 7846560"/>
+              <a:gd name="textAreaRight" fmla="*/ 7848720 w 7846560"/>
               <a:gd name="textAreaTop" fmla="*/ 0 h 360"/>
-              <a:gd name="textAreaBottom" fmla="*/ 5760 h 360"/>
+              <a:gd name="textAreaBottom" fmla="*/ 11520 h 360"/>
             </a:gdLst>
             <a:ahLst/>
             <a:rect l="textAreaLeft" t="textAreaTop" r="textAreaRight" b="textAreaBottom"/>
@@ -12685,7 +12685,7 @@
         <p:spPr>
           <a:xfrm>
             <a:off x="3108960" y="5315040"/>
-            <a:ext cx="2924280" cy="284040"/>
+            <a:ext cx="2923920" cy="283680"/>
           </a:xfrm>
           <a:prstGeom prst="rect">
             <a:avLst/>
@@ -12757,7 +12757,7 @@
         <p:spPr>
           <a:xfrm>
             <a:off x="6583680" y="5315040"/>
-            <a:ext cx="2101320" cy="284040"/>
+            <a:ext cx="2100960" cy="283680"/>
           </a:xfrm>
           <a:prstGeom prst="rect">
             <a:avLst/>
@@ -12798,7 +12798,7 @@
                 <a:tab algn="l" pos="0"/>
               </a:tabLst>
             </a:pPr>
-            <a:fld id="{68C36214-DABB-4FB3-99FB-A61874CAE6C0}" type="slidenum">
+            <a:fld id="{F8871438-0BE5-4C90-950B-B1D01B775D36}" type="slidenum">
               <a:rPr b="0" lang="fr-FR" sz="1400" spc="-1" strike="noStrike">
                 <a:solidFill>
                   <a:srgbClr val="b2b2b2"/>
@@ -12829,7 +12829,7 @@
         <p:spPr>
           <a:xfrm>
             <a:off x="457200" y="5315040"/>
-            <a:ext cx="2101320" cy="284040"/>
+            <a:ext cx="2100960" cy="283680"/>
           </a:xfrm>
           <a:prstGeom prst="rect">
             <a:avLst/>
@@ -13200,7 +13200,7 @@
         <p:spPr>
           <a:xfrm>
             <a:off x="764640" y="848520"/>
-            <a:ext cx="7707600" cy="1839600"/>
+            <a:ext cx="7707240" cy="1839240"/>
           </a:xfrm>
           <a:prstGeom prst="rect">
             <a:avLst/>
@@ -13237,7 +13237,7 @@
               <a:t>PROJET</a:t>
             </a:r>
             <a:r>
-              <a:rPr b="0" lang="fr-FR" sz="4000" spc="695" strike="noStrike">
+              <a:rPr b="0" lang="fr-FR" sz="4000" spc="693" strike="noStrike">
                 <a:solidFill>
                   <a:srgbClr val="d2523b"/>
                 </a:solidFill>
@@ -13255,7 +13255,7 @@
               <a:t>4</a:t>
             </a:r>
             <a:r>
-              <a:rPr b="0" lang="fr-FR" sz="4000" spc="741" strike="noStrike">
+              <a:rPr b="0" lang="fr-FR" sz="4000" spc="738" strike="noStrike">
                 <a:solidFill>
                   <a:srgbClr val="d2523b"/>
                 </a:solidFill>
@@ -13273,7 +13273,7 @@
               <a:t>–</a:t>
             </a:r>
             <a:r>
-              <a:rPr b="0" lang="fr-FR" sz="4000" spc="761" strike="noStrike">
+              <a:rPr b="0" lang="fr-FR" sz="4000" spc="758" strike="noStrike">
                 <a:solidFill>
                   <a:srgbClr val="d2523b"/>
                 </a:solidFill>
@@ -13291,7 +13291,7 @@
               <a:t>«</a:t>
             </a:r>
             <a:r>
-              <a:rPr b="0" lang="fr-FR" sz="4000" spc="766" strike="noStrike">
+              <a:rPr b="0" lang="fr-FR" sz="4000" spc="763" strike="noStrike">
                 <a:solidFill>
                   <a:srgbClr val="d2523b"/>
                 </a:solidFill>
@@ -13309,7 +13309,7 @@
               <a:t>ANTICIPEZ</a:t>
             </a:r>
             <a:r>
-              <a:rPr b="0" lang="fr-FR" sz="4000" spc="741" strike="noStrike">
+              <a:rPr b="0" lang="fr-FR" sz="4000" spc="738" strike="noStrike">
                 <a:solidFill>
                   <a:srgbClr val="d2523b"/>
                 </a:solidFill>
@@ -13336,25 +13336,25 @@
               <a:t>BESOINS</a:t>
             </a:r>
             <a:r>
+              <a:rPr b="0" lang="fr-FR" sz="4000" spc="55" strike="noStrike">
+                <a:solidFill>
+                  <a:srgbClr val="d2523b"/>
+                </a:solidFill>
+                <a:latin typeface="Arial"/>
+              </a:rPr>
+              <a:t>  </a:t>
+            </a:r>
+            <a:r>
+              <a:rPr b="0" lang="fr-FR" sz="4000" spc="-1" strike="noStrike">
+                <a:solidFill>
+                  <a:srgbClr val="d2523b"/>
+                </a:solidFill>
+                <a:latin typeface="Arial"/>
+              </a:rPr>
+              <a:t>EN</a:t>
+            </a:r>
+            <a:r>
               <a:rPr b="0" lang="fr-FR" sz="4000" spc="58" strike="noStrike">
-                <a:solidFill>
-                  <a:srgbClr val="d2523b"/>
-                </a:solidFill>
-                <a:latin typeface="Arial"/>
-              </a:rPr>
-              <a:t>  </a:t>
-            </a:r>
-            <a:r>
-              <a:rPr b="0" lang="fr-FR" sz="4000" spc="-1" strike="noStrike">
-                <a:solidFill>
-                  <a:srgbClr val="d2523b"/>
-                </a:solidFill>
-                <a:latin typeface="Arial"/>
-              </a:rPr>
-              <a:t>EN</a:t>
-            </a:r>
-            <a:r>
-              <a:rPr b="0" lang="fr-FR" sz="4000" spc="60" strike="noStrike">
                 <a:solidFill>
                   <a:srgbClr val="d2523b"/>
                 </a:solidFill>
@@ -13456,7 +13456,7 @@
         <p:spPr>
           <a:xfrm>
             <a:off x="764640" y="2873880"/>
-            <a:ext cx="2926800" cy="3325320"/>
+            <a:ext cx="2926440" cy="3324960"/>
           </a:xfrm>
           <a:prstGeom prst="rect">
             <a:avLst/>
@@ -13493,7 +13493,7 @@
               <a:t>Soutenance</a:t>
             </a:r>
             <a:r>
-              <a:rPr b="0" lang="fr-FR" sz="2400" spc="12" strike="noStrike">
+              <a:rPr b="0" lang="fr-FR" sz="2400" spc="9" strike="noStrike">
                 <a:solidFill>
                   <a:srgbClr val="56566d"/>
                 </a:solidFill>
@@ -13559,7 +13559,7 @@
         <p:spPr>
           <a:xfrm>
             <a:off x="8100360" y="4585680"/>
-            <a:ext cx="718200" cy="718200"/>
+            <a:ext cx="717840" cy="717840"/>
           </a:xfrm>
           <a:prstGeom prst="rect">
             <a:avLst/>
@@ -13578,7 +13578,7 @@
         <p:spPr>
           <a:xfrm>
             <a:off x="7700040" y="27000"/>
-            <a:ext cx="123120" cy="226080"/>
+            <a:ext cx="122760" cy="226080"/>
           </a:xfrm>
           <a:prstGeom prst="rect">
             <a:avLst/>
@@ -13665,15 +13665,15 @@
         <p:spPr>
           <a:xfrm>
             <a:off x="0" y="0"/>
-            <a:ext cx="9142200" cy="303120"/>
+            <a:ext cx="9141840" cy="302760"/>
           </a:xfrm>
           <a:custGeom>
             <a:avLst/>
             <a:gdLst>
-              <a:gd name="textAreaLeft" fmla="*/ 0 w 9142200"/>
-              <a:gd name="textAreaRight" fmla="*/ 9144000 w 9142200"/>
-              <a:gd name="textAreaTop" fmla="*/ 0 h 303120"/>
-              <a:gd name="textAreaBottom" fmla="*/ 304920 h 303120"/>
+              <a:gd name="textAreaLeft" fmla="*/ 0 w 9141840"/>
+              <a:gd name="textAreaRight" fmla="*/ 9144000 w 9141840"/>
+              <a:gd name="textAreaTop" fmla="*/ 0 h 302760"/>
+              <a:gd name="textAreaBottom" fmla="*/ 304920 h 302760"/>
             </a:gdLst>
             <a:ahLst/>
             <a:rect l="textAreaLeft" t="textAreaTop" r="textAreaRight" b="textAreaBottom"/>
@@ -13740,7 +13740,7 @@
         <p:spPr>
           <a:xfrm>
             <a:off x="5580000" y="204480"/>
-            <a:ext cx="3318480" cy="987840"/>
+            <a:ext cx="3318120" cy="987840"/>
           </a:xfrm>
           <a:prstGeom prst="rect">
             <a:avLst/>
@@ -13830,7 +13830,7 @@
         <p:spPr>
           <a:xfrm>
             <a:off x="4520160" y="1186200"/>
-            <a:ext cx="327600" cy="181800"/>
+            <a:ext cx="327240" cy="181800"/>
           </a:xfrm>
           <a:prstGeom prst="rect">
             <a:avLst/>
@@ -13884,7 +13884,7 @@
         <p:spPr>
           <a:xfrm>
             <a:off x="7700040" y="27000"/>
-            <a:ext cx="221760" cy="226080"/>
+            <a:ext cx="221400" cy="226080"/>
           </a:xfrm>
           <a:prstGeom prst="rect">
             <a:avLst/>
@@ -13945,7 +13945,7 @@
         <p:spPr>
           <a:xfrm>
             <a:off x="-180000" y="379080"/>
-            <a:ext cx="5767560" cy="5298840"/>
+            <a:ext cx="5767200" cy="5298480"/>
           </a:xfrm>
           <a:prstGeom prst="rect">
             <a:avLst/>
@@ -13964,7 +13964,7 @@
         <p:spPr>
           <a:xfrm>
             <a:off x="5587920" y="1117800"/>
-            <a:ext cx="3271680" cy="1398240"/>
+            <a:ext cx="3271320" cy="1398240"/>
           </a:xfrm>
           <a:prstGeom prst="rect">
             <a:avLst/>
@@ -14270,7 +14270,7 @@
         <p:spPr>
           <a:xfrm>
             <a:off x="5587920" y="2783160"/>
-            <a:ext cx="3353040" cy="2510280"/>
+            <a:ext cx="3352680" cy="2510280"/>
           </a:xfrm>
           <a:prstGeom prst="rect">
             <a:avLst/>
@@ -14845,7 +14845,7 @@
               <a:t>LargestPropertyUseTypeGFA</a:t>
             </a:r>
             <a:r>
-              <a:rPr b="0" lang="fr-FR" sz="900" spc="46" strike="noStrike">
+              <a:rPr b="0" lang="fr-FR" sz="900" spc="43" strike="noStrike">
                 <a:solidFill>
                   <a:srgbClr val="292934"/>
                 </a:solidFill>
@@ -14865,7 +14865,7 @@
               <a:t>et</a:t>
             </a:r>
             <a:r>
-              <a:rPr b="0" lang="fr-FR" sz="900" spc="97" strike="noStrike">
+              <a:rPr b="0" lang="fr-FR" sz="900" spc="94" strike="noStrike">
                 <a:solidFill>
                   <a:srgbClr val="292934"/>
                 </a:solidFill>
@@ -15126,7 +15126,7 @@
         <p:spPr>
           <a:xfrm>
             <a:off x="801000" y="2264400"/>
-            <a:ext cx="6039000" cy="2415600"/>
+            <a:ext cx="6038640" cy="2415240"/>
           </a:xfrm>
           <a:prstGeom prst="rect">
             <a:avLst/>
@@ -15255,7 +15255,7 @@
         <p:spPr>
           <a:xfrm>
             <a:off x="7700040" y="27000"/>
-            <a:ext cx="204120" cy="226080"/>
+            <a:ext cx="203760" cy="226080"/>
           </a:xfrm>
           <a:prstGeom prst="rect">
             <a:avLst/>
@@ -15342,9 +15342,9 @@
         <p:grpSpPr>
           <a:xfrm>
             <a:off x="2267640" y="1273320"/>
-            <a:ext cx="4693320" cy="3598560"/>
+            <a:ext cx="4692960" cy="3598200"/>
             <a:chOff x="2267640" y="1273320"/>
-            <a:chExt cx="4693320" cy="3598560"/>
+            <a:chExt cx="4692960" cy="3598200"/>
           </a:xfrm>
         </p:grpSpPr>
         <p:sp>
@@ -15356,15 +15356,15 @@
           <p:spPr>
             <a:xfrm>
               <a:off x="2267640" y="1273320"/>
-              <a:ext cx="4693320" cy="3598560"/>
+              <a:ext cx="4692960" cy="3598200"/>
             </a:xfrm>
             <a:custGeom>
               <a:avLst/>
               <a:gdLst>
-                <a:gd name="textAreaLeft" fmla="*/ 0 w 4693320"/>
-                <a:gd name="textAreaRight" fmla="*/ 4695120 w 4693320"/>
-                <a:gd name="textAreaTop" fmla="*/ 0 h 3598560"/>
-                <a:gd name="textAreaBottom" fmla="*/ 3600360 h 3598560"/>
+                <a:gd name="textAreaLeft" fmla="*/ 0 w 4692960"/>
+                <a:gd name="textAreaRight" fmla="*/ 4695120 w 4692960"/>
+                <a:gd name="textAreaTop" fmla="*/ 0 h 3598200"/>
+                <a:gd name="textAreaBottom" fmla="*/ 3600360 h 3598200"/>
               </a:gdLst>
               <a:ahLst/>
               <a:rect l="textAreaLeft" t="textAreaTop" r="textAreaRight" b="textAreaBottom"/>
@@ -15431,15 +15431,15 @@
           <p:spPr>
             <a:xfrm>
               <a:off x="2267640" y="1273320"/>
-              <a:ext cx="4693320" cy="3598560"/>
+              <a:ext cx="4692960" cy="3598200"/>
             </a:xfrm>
             <a:custGeom>
               <a:avLst/>
               <a:gdLst>
-                <a:gd name="textAreaLeft" fmla="*/ 0 w 4693320"/>
-                <a:gd name="textAreaRight" fmla="*/ 4695120 w 4693320"/>
-                <a:gd name="textAreaTop" fmla="*/ 0 h 3598560"/>
-                <a:gd name="textAreaBottom" fmla="*/ 3600360 h 3598560"/>
+                <a:gd name="textAreaLeft" fmla="*/ 0 w 4692960"/>
+                <a:gd name="textAreaRight" fmla="*/ 4695120 w 4692960"/>
+                <a:gd name="textAreaTop" fmla="*/ 0 h 3598200"/>
+                <a:gd name="textAreaBottom" fmla="*/ 3600360 h 3598200"/>
               </a:gdLst>
               <a:ahLst/>
               <a:rect l="textAreaLeft" t="textAreaTop" r="textAreaRight" b="textAreaBottom"/>
@@ -15507,15 +15507,15 @@
           <p:spPr>
             <a:xfrm>
               <a:off x="2271600" y="2634840"/>
-              <a:ext cx="304200" cy="356400"/>
+              <a:ext cx="303840" cy="356040"/>
             </a:xfrm>
             <a:custGeom>
               <a:avLst/>
               <a:gdLst>
-                <a:gd name="textAreaLeft" fmla="*/ 0 w 304200"/>
-                <a:gd name="textAreaRight" fmla="*/ 306000 w 304200"/>
-                <a:gd name="textAreaTop" fmla="*/ 0 h 356400"/>
-                <a:gd name="textAreaBottom" fmla="*/ 358200 h 356400"/>
+                <a:gd name="textAreaLeft" fmla="*/ 0 w 303840"/>
+                <a:gd name="textAreaRight" fmla="*/ 306000 w 303840"/>
+                <a:gd name="textAreaTop" fmla="*/ 0 h 356040"/>
+                <a:gd name="textAreaBottom" fmla="*/ 358200 h 356040"/>
               </a:gdLst>
               <a:ahLst/>
               <a:rect l="textAreaLeft" t="textAreaTop" r="textAreaRight" b="textAreaBottom"/>
@@ -15591,15 +15591,15 @@
           <p:spPr>
             <a:xfrm>
               <a:off x="2704320" y="2127240"/>
-              <a:ext cx="1441080" cy="1371240"/>
+              <a:ext cx="1440720" cy="1370880"/>
             </a:xfrm>
             <a:custGeom>
               <a:avLst/>
               <a:gdLst>
-                <a:gd name="textAreaLeft" fmla="*/ 0 w 1441080"/>
-                <a:gd name="textAreaRight" fmla="*/ 1442880 w 1441080"/>
-                <a:gd name="textAreaTop" fmla="*/ 0 h 1371240"/>
-                <a:gd name="textAreaBottom" fmla="*/ 1373040 h 1371240"/>
+                <a:gd name="textAreaLeft" fmla="*/ 0 w 1440720"/>
+                <a:gd name="textAreaRight" fmla="*/ 1442880 w 1440720"/>
+                <a:gd name="textAreaTop" fmla="*/ 0 h 1370880"/>
+                <a:gd name="textAreaBottom" fmla="*/ 1373040 h 1370880"/>
               </a:gdLst>
               <a:ahLst/>
               <a:rect l="textAreaLeft" t="textAreaTop" r="textAreaRight" b="textAreaBottom"/>
@@ -15726,15 +15726,15 @@
           <p:spPr>
             <a:xfrm>
               <a:off x="2704320" y="2127240"/>
-              <a:ext cx="1441080" cy="1371240"/>
+              <a:ext cx="1440720" cy="1370880"/>
             </a:xfrm>
             <a:custGeom>
               <a:avLst/>
               <a:gdLst>
-                <a:gd name="textAreaLeft" fmla="*/ 0 w 1441080"/>
-                <a:gd name="textAreaRight" fmla="*/ 1442880 w 1441080"/>
-                <a:gd name="textAreaTop" fmla="*/ 0 h 1371240"/>
-                <a:gd name="textAreaBottom" fmla="*/ 1373040 h 1371240"/>
+                <a:gd name="textAreaLeft" fmla="*/ 0 w 1440720"/>
+                <a:gd name="textAreaRight" fmla="*/ 1442880 w 1440720"/>
+                <a:gd name="textAreaTop" fmla="*/ 0 h 1370880"/>
+                <a:gd name="textAreaBottom" fmla="*/ 1373040 h 1370880"/>
               </a:gdLst>
               <a:ahLst/>
               <a:rect l="textAreaLeft" t="textAreaTop" r="textAreaRight" b="textAreaBottom"/>
@@ -15867,7 +15867,7 @@
         <p:spPr>
           <a:xfrm>
             <a:off x="536040" y="526320"/>
-            <a:ext cx="7740000" cy="965160"/>
+            <a:ext cx="7739640" cy="964800"/>
           </a:xfrm>
           <a:prstGeom prst="rect">
             <a:avLst/>
@@ -15975,7 +15975,7 @@
         <p:spPr>
           <a:xfrm>
             <a:off x="7700040" y="27000"/>
-            <a:ext cx="221760" cy="226080"/>
+            <a:ext cx="221400" cy="226080"/>
           </a:xfrm>
           <a:prstGeom prst="rect">
             <a:avLst/>
@@ -16032,9 +16032,9 @@
         <p:grpSpPr>
           <a:xfrm>
             <a:off x="684720" y="2127240"/>
-            <a:ext cx="1441080" cy="1371240"/>
+            <a:ext cx="1440720" cy="1370880"/>
             <a:chOff x="684720" y="2127240"/>
-            <a:chExt cx="1441080" cy="1371240"/>
+            <a:chExt cx="1440720" cy="1370880"/>
           </a:xfrm>
         </p:grpSpPr>
         <p:sp>
@@ -16046,15 +16046,15 @@
           <p:spPr>
             <a:xfrm>
               <a:off x="684720" y="2127240"/>
-              <a:ext cx="1441080" cy="1371240"/>
+              <a:ext cx="1440720" cy="1370880"/>
             </a:xfrm>
             <a:custGeom>
               <a:avLst/>
               <a:gdLst>
-                <a:gd name="textAreaLeft" fmla="*/ 0 w 1441080"/>
-                <a:gd name="textAreaRight" fmla="*/ 1442880 w 1441080"/>
-                <a:gd name="textAreaTop" fmla="*/ 0 h 1371240"/>
-                <a:gd name="textAreaBottom" fmla="*/ 1373040 h 1371240"/>
+                <a:gd name="textAreaLeft" fmla="*/ 0 w 1440720"/>
+                <a:gd name="textAreaRight" fmla="*/ 1442880 w 1440720"/>
+                <a:gd name="textAreaTop" fmla="*/ 0 h 1370880"/>
+                <a:gd name="textAreaBottom" fmla="*/ 1373040 h 1370880"/>
               </a:gdLst>
               <a:ahLst/>
               <a:rect l="textAreaLeft" t="textAreaTop" r="textAreaRight" b="textAreaBottom"/>
@@ -16181,15 +16181,15 @@
           <p:spPr>
             <a:xfrm>
               <a:off x="684720" y="2127240"/>
-              <a:ext cx="1441080" cy="1371240"/>
+              <a:ext cx="1440720" cy="1370880"/>
             </a:xfrm>
             <a:custGeom>
               <a:avLst/>
               <a:gdLst>
-                <a:gd name="textAreaLeft" fmla="*/ 0 w 1441080"/>
-                <a:gd name="textAreaRight" fmla="*/ 1442880 w 1441080"/>
-                <a:gd name="textAreaTop" fmla="*/ 0 h 1371240"/>
-                <a:gd name="textAreaBottom" fmla="*/ 1373040 h 1371240"/>
+                <a:gd name="textAreaLeft" fmla="*/ 0 w 1440720"/>
+                <a:gd name="textAreaRight" fmla="*/ 1442880 w 1440720"/>
+                <a:gd name="textAreaTop" fmla="*/ 0 h 1370880"/>
+                <a:gd name="textAreaBottom" fmla="*/ 1373040 h 1370880"/>
               </a:gdLst>
               <a:ahLst/>
               <a:rect l="textAreaLeft" t="textAreaTop" r="textAreaRight" b="textAreaBottom"/>
@@ -16318,7 +16318,7 @@
         <p:spPr>
           <a:xfrm>
             <a:off x="819000" y="2313000"/>
-            <a:ext cx="1171800" cy="952920"/>
+            <a:ext cx="1171440" cy="952920"/>
           </a:xfrm>
           <a:prstGeom prst="rect">
             <a:avLst/>
@@ -16477,7 +16477,7 @@
         <p:spPr>
           <a:xfrm>
             <a:off x="2842560" y="2585880"/>
-            <a:ext cx="1178640" cy="411480"/>
+            <a:ext cx="1178280" cy="411480"/>
           </a:xfrm>
           <a:prstGeom prst="rect">
             <a:avLst/>
@@ -16587,9 +16587,9 @@
         <p:grpSpPr>
           <a:xfrm>
             <a:off x="4291200" y="2127240"/>
-            <a:ext cx="2140920" cy="1371240"/>
+            <a:ext cx="2140560" cy="1370880"/>
             <a:chOff x="4291200" y="2127240"/>
-            <a:chExt cx="2140920" cy="1371240"/>
+            <a:chExt cx="2140560" cy="1370880"/>
           </a:xfrm>
         </p:grpSpPr>
         <p:sp>
@@ -16601,15 +16601,15 @@
           <p:spPr>
             <a:xfrm>
               <a:off x="4291200" y="2634840"/>
-              <a:ext cx="304200" cy="356400"/>
+              <a:ext cx="303840" cy="356040"/>
             </a:xfrm>
             <a:custGeom>
               <a:avLst/>
               <a:gdLst>
-                <a:gd name="textAreaLeft" fmla="*/ 0 w 304200"/>
-                <a:gd name="textAreaRight" fmla="*/ 306000 w 304200"/>
-                <a:gd name="textAreaTop" fmla="*/ 0 h 356400"/>
-                <a:gd name="textAreaBottom" fmla="*/ 358200 h 356400"/>
+                <a:gd name="textAreaLeft" fmla="*/ 0 w 303840"/>
+                <a:gd name="textAreaRight" fmla="*/ 306000 w 303840"/>
+                <a:gd name="textAreaTop" fmla="*/ 0 h 356040"/>
+                <a:gd name="textAreaBottom" fmla="*/ 358200 h 356040"/>
               </a:gdLst>
               <a:ahLst/>
               <a:rect l="textAreaLeft" t="textAreaTop" r="textAreaRight" b="textAreaBottom"/>
@@ -16685,15 +16685,15 @@
           <p:spPr>
             <a:xfrm>
               <a:off x="4723920" y="2127240"/>
-              <a:ext cx="1708200" cy="1371240"/>
+              <a:ext cx="1707840" cy="1370880"/>
             </a:xfrm>
             <a:custGeom>
               <a:avLst/>
               <a:gdLst>
-                <a:gd name="textAreaLeft" fmla="*/ 0 w 1708200"/>
-                <a:gd name="textAreaRight" fmla="*/ 1710000 w 1708200"/>
-                <a:gd name="textAreaTop" fmla="*/ 0 h 1371240"/>
-                <a:gd name="textAreaBottom" fmla="*/ 1373040 h 1371240"/>
+                <a:gd name="textAreaLeft" fmla="*/ 0 w 1707840"/>
+                <a:gd name="textAreaRight" fmla="*/ 1710000 w 1707840"/>
+                <a:gd name="textAreaTop" fmla="*/ 0 h 1370880"/>
+                <a:gd name="textAreaBottom" fmla="*/ 1373040 h 1370880"/>
               </a:gdLst>
               <a:ahLst/>
               <a:rect l="textAreaLeft" t="textAreaTop" r="textAreaRight" b="textAreaBottom"/>
@@ -16820,15 +16820,15 @@
           <p:spPr>
             <a:xfrm>
               <a:off x="4723920" y="2127240"/>
-              <a:ext cx="1708200" cy="1371240"/>
+              <a:ext cx="1707840" cy="1370880"/>
             </a:xfrm>
             <a:custGeom>
               <a:avLst/>
               <a:gdLst>
-                <a:gd name="textAreaLeft" fmla="*/ 0 w 1708200"/>
-                <a:gd name="textAreaRight" fmla="*/ 1710000 w 1708200"/>
-                <a:gd name="textAreaTop" fmla="*/ 0 h 1371240"/>
-                <a:gd name="textAreaBottom" fmla="*/ 1373040 h 1371240"/>
+                <a:gd name="textAreaLeft" fmla="*/ 0 w 1707840"/>
+                <a:gd name="textAreaRight" fmla="*/ 1710000 w 1707840"/>
+                <a:gd name="textAreaTop" fmla="*/ 0 h 1370880"/>
+                <a:gd name="textAreaBottom" fmla="*/ 1373040 h 1370880"/>
               </a:gdLst>
               <a:ahLst/>
               <a:rect l="textAreaLeft" t="textAreaTop" r="textAreaRight" b="textAreaBottom"/>
@@ -16957,7 +16957,7 @@
         <p:spPr>
           <a:xfrm>
             <a:off x="4818240" y="2176560"/>
-            <a:ext cx="1404720" cy="1216440"/>
+            <a:ext cx="1404360" cy="1216440"/>
           </a:xfrm>
           <a:prstGeom prst="rect">
             <a:avLst/>
@@ -17266,9 +17266,9 @@
         <p:grpSpPr>
           <a:xfrm>
             <a:off x="6577920" y="2127240"/>
-            <a:ext cx="2023560" cy="1371240"/>
+            <a:ext cx="2023200" cy="1370880"/>
             <a:chOff x="6577920" y="2127240"/>
-            <a:chExt cx="2023560" cy="1371240"/>
+            <a:chExt cx="2023200" cy="1370880"/>
           </a:xfrm>
         </p:grpSpPr>
         <p:sp>
@@ -17280,15 +17280,15 @@
           <p:spPr>
             <a:xfrm>
               <a:off x="6577920" y="2634840"/>
-              <a:ext cx="304200" cy="356400"/>
+              <a:ext cx="303840" cy="356040"/>
             </a:xfrm>
             <a:custGeom>
               <a:avLst/>
               <a:gdLst>
-                <a:gd name="textAreaLeft" fmla="*/ 0 w 304200"/>
-                <a:gd name="textAreaRight" fmla="*/ 306000 w 304200"/>
-                <a:gd name="textAreaTop" fmla="*/ 0 h 356400"/>
-                <a:gd name="textAreaBottom" fmla="*/ 358200 h 356400"/>
+                <a:gd name="textAreaLeft" fmla="*/ 0 w 303840"/>
+                <a:gd name="textAreaRight" fmla="*/ 306000 w 303840"/>
+                <a:gd name="textAreaTop" fmla="*/ 0 h 356040"/>
+                <a:gd name="textAreaBottom" fmla="*/ 358200 h 356040"/>
               </a:gdLst>
               <a:ahLst/>
               <a:rect l="textAreaLeft" t="textAreaTop" r="textAreaRight" b="textAreaBottom"/>
@@ -17364,15 +17364,15 @@
           <p:spPr>
             <a:xfrm>
               <a:off x="7010640" y="2127240"/>
-              <a:ext cx="1590840" cy="1371240"/>
+              <a:ext cx="1590480" cy="1370880"/>
             </a:xfrm>
             <a:custGeom>
               <a:avLst/>
               <a:gdLst>
-                <a:gd name="textAreaLeft" fmla="*/ 0 w 1590840"/>
-                <a:gd name="textAreaRight" fmla="*/ 1592640 w 1590840"/>
-                <a:gd name="textAreaTop" fmla="*/ 0 h 1371240"/>
-                <a:gd name="textAreaBottom" fmla="*/ 1373040 h 1371240"/>
+                <a:gd name="textAreaLeft" fmla="*/ 0 w 1590480"/>
+                <a:gd name="textAreaRight" fmla="*/ 1592640 w 1590480"/>
+                <a:gd name="textAreaTop" fmla="*/ 0 h 1370880"/>
+                <a:gd name="textAreaBottom" fmla="*/ 1373040 h 1370880"/>
               </a:gdLst>
               <a:ahLst/>
               <a:rect l="textAreaLeft" t="textAreaTop" r="textAreaRight" b="textAreaBottom"/>
@@ -17499,15 +17499,15 @@
           <p:spPr>
             <a:xfrm>
               <a:off x="7010640" y="2127240"/>
-              <a:ext cx="1590840" cy="1371240"/>
+              <a:ext cx="1590480" cy="1370880"/>
             </a:xfrm>
             <a:custGeom>
               <a:avLst/>
               <a:gdLst>
-                <a:gd name="textAreaLeft" fmla="*/ 0 w 1590840"/>
-                <a:gd name="textAreaRight" fmla="*/ 1592640 w 1590840"/>
-                <a:gd name="textAreaTop" fmla="*/ 0 h 1371240"/>
-                <a:gd name="textAreaBottom" fmla="*/ 1373040 h 1371240"/>
+                <a:gd name="textAreaLeft" fmla="*/ 0 w 1590480"/>
+                <a:gd name="textAreaRight" fmla="*/ 1592640 w 1590480"/>
+                <a:gd name="textAreaTop" fmla="*/ 0 h 1370880"/>
+                <a:gd name="textAreaBottom" fmla="*/ 1373040 h 1370880"/>
               </a:gdLst>
               <a:ahLst/>
               <a:rect l="textAreaLeft" t="textAreaTop" r="textAreaRight" b="textAreaBottom"/>
@@ -17636,7 +17636,7 @@
         <p:spPr>
           <a:xfrm>
             <a:off x="7097760" y="2401560"/>
-            <a:ext cx="1417320" cy="775080"/>
+            <a:ext cx="1416960" cy="775080"/>
           </a:xfrm>
           <a:prstGeom prst="rect">
             <a:avLst/>
@@ -17803,9 +17803,9 @@
         <p:grpSpPr>
           <a:xfrm>
             <a:off x="3679200" y="3721680"/>
-            <a:ext cx="1654920" cy="286560"/>
+            <a:ext cx="1654560" cy="286200"/>
             <a:chOff x="3679200" y="3721680"/>
-            <a:chExt cx="1654920" cy="286560"/>
+            <a:chExt cx="1654560" cy="286200"/>
           </a:xfrm>
         </p:grpSpPr>
         <p:sp>
@@ -17817,15 +17817,15 @@
           <p:spPr>
             <a:xfrm>
               <a:off x="3679200" y="3721680"/>
-              <a:ext cx="833760" cy="286560"/>
+              <a:ext cx="833400" cy="286200"/>
             </a:xfrm>
             <a:custGeom>
               <a:avLst/>
               <a:gdLst>
-                <a:gd name="textAreaLeft" fmla="*/ 0 w 833760"/>
-                <a:gd name="textAreaRight" fmla="*/ 835560 w 833760"/>
-                <a:gd name="textAreaTop" fmla="*/ 0 h 286560"/>
-                <a:gd name="textAreaBottom" fmla="*/ 288360 h 286560"/>
+                <a:gd name="textAreaLeft" fmla="*/ 0 w 833400"/>
+                <a:gd name="textAreaRight" fmla="*/ 835560 w 833400"/>
+                <a:gd name="textAreaTop" fmla="*/ 0 h 286200"/>
+                <a:gd name="textAreaBottom" fmla="*/ 288360 h 286200"/>
               </a:gdLst>
               <a:ahLst/>
               <a:rect l="textAreaLeft" t="textAreaTop" r="textAreaRight" b="textAreaBottom"/>
@@ -17979,15 +17979,15 @@
           <p:spPr>
             <a:xfrm>
               <a:off x="4500000" y="3721680"/>
-              <a:ext cx="833760" cy="286560"/>
+              <a:ext cx="833400" cy="286200"/>
             </a:xfrm>
             <a:custGeom>
               <a:avLst/>
               <a:gdLst>
-                <a:gd name="textAreaLeft" fmla="*/ 0 w 833760"/>
-                <a:gd name="textAreaRight" fmla="*/ 835560 w 833760"/>
-                <a:gd name="textAreaTop" fmla="*/ 0 h 286560"/>
-                <a:gd name="textAreaBottom" fmla="*/ 288360 h 286560"/>
+                <a:gd name="textAreaLeft" fmla="*/ 0 w 833400"/>
+                <a:gd name="textAreaRight" fmla="*/ 835560 w 833400"/>
+                <a:gd name="textAreaTop" fmla="*/ 0 h 286200"/>
+                <a:gd name="textAreaBottom" fmla="*/ 288360 h 286200"/>
               </a:gdLst>
               <a:ahLst/>
               <a:rect l="textAreaLeft" t="textAreaTop" r="textAreaRight" b="textAreaBottom"/>
@@ -18147,15 +18147,15 @@
           <p:spPr>
             <a:xfrm>
               <a:off x="3679200" y="3721680"/>
-              <a:ext cx="1654920" cy="286560"/>
+              <a:ext cx="1654560" cy="286200"/>
             </a:xfrm>
             <a:custGeom>
               <a:avLst/>
               <a:gdLst>
-                <a:gd name="textAreaLeft" fmla="*/ 0 w 1654920"/>
-                <a:gd name="textAreaRight" fmla="*/ 1656720 w 1654920"/>
-                <a:gd name="textAreaTop" fmla="*/ 0 h 286560"/>
-                <a:gd name="textAreaBottom" fmla="*/ 288360 h 286560"/>
+                <a:gd name="textAreaLeft" fmla="*/ 0 w 1654560"/>
+                <a:gd name="textAreaRight" fmla="*/ 1656720 w 1654560"/>
+                <a:gd name="textAreaTop" fmla="*/ 0 h 286200"/>
+                <a:gd name="textAreaBottom" fmla="*/ 288360 h 286200"/>
               </a:gdLst>
               <a:ahLst/>
               <a:rect l="textAreaLeft" t="textAreaTop" r="textAreaRight" b="textAreaBottom"/>
@@ -18409,7 +18409,7 @@
         <p:spPr>
           <a:xfrm>
             <a:off x="3745080" y="4039200"/>
-            <a:ext cx="1419840" cy="498600"/>
+            <a:ext cx="1419480" cy="498600"/>
           </a:xfrm>
           <a:prstGeom prst="rect">
             <a:avLst/>
@@ -18499,7 +18499,7 @@
         <p:spPr>
           <a:xfrm>
             <a:off x="2359440" y="1300680"/>
-            <a:ext cx="2745720" cy="286560"/>
+            <a:ext cx="2745360" cy="286560"/>
           </a:xfrm>
           <a:prstGeom prst="rect">
             <a:avLst/>
@@ -18586,7 +18586,7 @@
         <p:spPr>
           <a:xfrm>
             <a:off x="474480" y="5047560"/>
-            <a:ext cx="7265520" cy="195480"/>
+            <a:ext cx="7265160" cy="194760"/>
           </a:xfrm>
           <a:prstGeom prst="rect">
             <a:avLst/>
@@ -18937,7 +18937,7 @@
         <p:spPr>
           <a:xfrm>
             <a:off x="536040" y="526320"/>
-            <a:ext cx="8463240" cy="1230120"/>
+            <a:ext cx="8462880" cy="1229760"/>
           </a:xfrm>
           <a:prstGeom prst="rect">
             <a:avLst/>
@@ -19045,7 +19045,7 @@
         <p:spPr>
           <a:xfrm>
             <a:off x="7700040" y="27000"/>
-            <a:ext cx="221760" cy="226080"/>
+            <a:ext cx="221400" cy="226080"/>
           </a:xfrm>
           <a:prstGeom prst="rect">
             <a:avLst/>
@@ -19638,7 +19638,7 @@
                         <a:t>7</a:t>
                       </a:r>
                       <a:r>
-                        <a:rPr b="0" lang="fr-FR" sz="1800" spc="248" strike="noStrike" baseline="25000">
+                        <a:rPr b="0" lang="fr-FR" sz="1800" spc="245" strike="noStrike" baseline="25000">
                           <a:solidFill>
                             <a:srgbClr val="292934"/>
                           </a:solidFill>
@@ -21962,7 +21962,7 @@
         <p:spPr>
           <a:xfrm>
             <a:off x="402480" y="5226120"/>
-            <a:ext cx="3933360" cy="286560"/>
+            <a:ext cx="3933000" cy="286560"/>
           </a:xfrm>
           <a:prstGeom prst="rect">
             <a:avLst/>
@@ -22100,9 +22100,32 @@
           <a:chExt cx="0" cy="0"/>
         </a:xfrm>
       </p:grpSpPr>
+      <p:pic>
+        <p:nvPicPr>
+          <p:cNvPr id="281" name="object 9" descr=""/>
+          <p:cNvPicPr/>
+          <p:nvPr/>
+        </p:nvPicPr>
+        <p:blipFill>
+          <a:blip r:embed="rId1"/>
+          <a:stretch/>
+        </p:blipFill>
+        <p:spPr>
+          <a:xfrm>
+            <a:off x="3420000" y="481320"/>
+            <a:ext cx="5686200" cy="2328840"/>
+          </a:xfrm>
+          <a:prstGeom prst="rect">
+            <a:avLst/>
+          </a:prstGeom>
+          <a:ln w="0">
+            <a:noFill/>
+          </a:ln>
+        </p:spPr>
+      </p:pic>
       <p:sp>
         <p:nvSpPr>
-          <p:cNvPr id="281" name="PlaceHolder 1"/>
+          <p:cNvPr id="282" name="PlaceHolder 1"/>
           <p:cNvSpPr>
             <a:spLocks noGrp="1"/>
           </p:cNvSpPr>
@@ -22113,7 +22136,7 @@
         <p:spPr>
           <a:xfrm>
             <a:off x="330120" y="283320"/>
-            <a:ext cx="6329160" cy="987120"/>
+            <a:ext cx="6328800" cy="986760"/>
           </a:xfrm>
           <a:prstGeom prst="rect">
             <a:avLst/>
@@ -22196,14 +22219,14 @@
       </p:sp>
       <p:sp>
         <p:nvSpPr>
-          <p:cNvPr id="282" name="object 6"/>
+          <p:cNvPr id="283" name="object 6"/>
           <p:cNvSpPr/>
           <p:nvPr/>
         </p:nvSpPr>
         <p:spPr>
           <a:xfrm>
             <a:off x="7700040" y="27000"/>
-            <a:ext cx="221760" cy="226080"/>
+            <a:ext cx="221400" cy="226080"/>
           </a:xfrm>
           <a:prstGeom prst="rect">
             <a:avLst/>
@@ -22253,22 +22276,22 @@
       </p:sp>
       <p:sp>
         <p:nvSpPr>
-          <p:cNvPr id="283" name="object 7"/>
+          <p:cNvPr id="284" name="object 7"/>
           <p:cNvSpPr/>
           <p:nvPr/>
         </p:nvSpPr>
         <p:spPr>
           <a:xfrm>
-            <a:off x="4500000" y="1057320"/>
-            <a:ext cx="1438560" cy="1510920"/>
+            <a:off x="3816000" y="1165320"/>
+            <a:ext cx="1438200" cy="1510560"/>
           </a:xfrm>
           <a:custGeom>
             <a:avLst/>
             <a:gdLst>
-              <a:gd name="textAreaLeft" fmla="*/ 0 w 1438560"/>
-              <a:gd name="textAreaRight" fmla="*/ 1440360 w 1438560"/>
-              <a:gd name="textAreaTop" fmla="*/ 0 h 1510920"/>
-              <a:gd name="textAreaBottom" fmla="*/ 1512720 h 1510920"/>
+              <a:gd name="textAreaLeft" fmla="*/ 0 w 1438200"/>
+              <a:gd name="textAreaRight" fmla="*/ 1440360 w 1438200"/>
+              <a:gd name="textAreaTop" fmla="*/ 0 h 1510560"/>
+              <a:gd name="textAreaBottom" fmla="*/ 1512720 h 1510560"/>
             </a:gdLst>
             <a:ahLst/>
             <a:rect l="textAreaLeft" t="textAreaTop" r="textAreaRight" b="textAreaBottom"/>
@@ -22329,14 +22352,14 @@
       </p:sp>
       <p:sp>
         <p:nvSpPr>
-          <p:cNvPr id="284" name="object 8"/>
+          <p:cNvPr id="285" name="object 8"/>
           <p:cNvSpPr/>
           <p:nvPr/>
         </p:nvSpPr>
         <p:spPr>
           <a:xfrm>
             <a:off x="330120" y="771120"/>
-            <a:ext cx="2910960" cy="4307040"/>
+            <a:ext cx="2910600" cy="4307040"/>
           </a:xfrm>
           <a:prstGeom prst="rect">
             <a:avLst/>
@@ -23109,29 +23132,6 @@
       </p:sp>
       <p:pic>
         <p:nvPicPr>
-          <p:cNvPr id="285" name="object 9" descr=""/>
-          <p:cNvPicPr/>
-          <p:nvPr/>
-        </p:nvPicPr>
-        <p:blipFill>
-          <a:blip r:embed="rId1"/>
-          <a:stretch/>
-        </p:blipFill>
-        <p:spPr>
-          <a:xfrm>
-            <a:off x="3420000" y="481320"/>
-            <a:ext cx="5686560" cy="2329200"/>
-          </a:xfrm>
-          <a:prstGeom prst="rect">
-            <a:avLst/>
-          </a:prstGeom>
-          <a:ln w="0">
-            <a:noFill/>
-          </a:ln>
-        </p:spPr>
-      </p:pic>
-      <p:pic>
-        <p:nvPicPr>
           <p:cNvPr id="286" name="" descr=""/>
           <p:cNvPicPr/>
           <p:nvPr/>
@@ -23143,7 +23143,7 @@
         <p:spPr>
           <a:xfrm>
             <a:off x="3240000" y="2964600"/>
-            <a:ext cx="5736600" cy="2615400"/>
+            <a:ext cx="5736240" cy="2615040"/>
           </a:xfrm>
           <a:prstGeom prst="rect">
             <a:avLst/>
@@ -23192,7 +23192,7 @@
         <p:spPr>
           <a:xfrm>
             <a:off x="7700040" y="27000"/>
-            <a:ext cx="221760" cy="226080"/>
+            <a:ext cx="221400" cy="226080"/>
           </a:xfrm>
           <a:prstGeom prst="rect">
             <a:avLst/>
@@ -23253,7 +23253,7 @@
         <p:spPr>
           <a:xfrm>
             <a:off x="536040" y="221400"/>
-            <a:ext cx="8643600" cy="1855080"/>
+            <a:ext cx="8643240" cy="1854720"/>
           </a:xfrm>
           <a:prstGeom prst="rect">
             <a:avLst/>
@@ -23588,7 +23588,7 @@
         <p:spPr>
           <a:xfrm>
             <a:off x="536040" y="5083920"/>
-            <a:ext cx="7020000" cy="438480"/>
+            <a:ext cx="7019640" cy="438480"/>
           </a:xfrm>
           <a:prstGeom prst="rect">
             <a:avLst/>
@@ -23935,9 +23935,9 @@
         <p:grpSpPr>
           <a:xfrm>
             <a:off x="690120" y="1783800"/>
-            <a:ext cx="1965960" cy="2865960"/>
+            <a:ext cx="1965600" cy="2865600"/>
             <a:chOff x="690120" y="1783800"/>
-            <a:chExt cx="1965960" cy="2865960"/>
+            <a:chExt cx="1965600" cy="2865600"/>
           </a:xfrm>
         </p:grpSpPr>
         <p:sp>
@@ -23949,15 +23949,15 @@
           <p:spPr>
             <a:xfrm>
               <a:off x="690120" y="1783800"/>
-              <a:ext cx="1965960" cy="2865960"/>
+              <a:ext cx="1965600" cy="2865600"/>
             </a:xfrm>
             <a:custGeom>
               <a:avLst/>
               <a:gdLst>
-                <a:gd name="textAreaLeft" fmla="*/ 0 w 1965960"/>
-                <a:gd name="textAreaRight" fmla="*/ 1967760 w 1965960"/>
-                <a:gd name="textAreaTop" fmla="*/ 0 h 2865960"/>
-                <a:gd name="textAreaBottom" fmla="*/ 2867760 h 2865960"/>
+                <a:gd name="textAreaLeft" fmla="*/ 0 w 1965600"/>
+                <a:gd name="textAreaRight" fmla="*/ 1967760 w 1965600"/>
+                <a:gd name="textAreaTop" fmla="*/ 0 h 2865600"/>
+                <a:gd name="textAreaBottom" fmla="*/ 2867760 h 2865600"/>
               </a:gdLst>
               <a:ahLst/>
               <a:rect l="textAreaLeft" t="textAreaTop" r="textAreaRight" b="textAreaBottom"/>
@@ -24108,15 +24108,15 @@
           <p:spPr>
             <a:xfrm>
               <a:off x="690120" y="1783800"/>
-              <a:ext cx="1965960" cy="2865960"/>
+              <a:ext cx="1965600" cy="2865600"/>
             </a:xfrm>
             <a:custGeom>
               <a:avLst/>
               <a:gdLst>
-                <a:gd name="textAreaLeft" fmla="*/ 0 w 1965960"/>
-                <a:gd name="textAreaRight" fmla="*/ 1967760 w 1965960"/>
-                <a:gd name="textAreaTop" fmla="*/ 0 h 2865960"/>
-                <a:gd name="textAreaBottom" fmla="*/ 2867760 h 2865960"/>
+                <a:gd name="textAreaLeft" fmla="*/ 0 w 1965600"/>
+                <a:gd name="textAreaRight" fmla="*/ 1967760 w 1965600"/>
+                <a:gd name="textAreaTop" fmla="*/ 0 h 2865600"/>
+                <a:gd name="textAreaBottom" fmla="*/ 2867760 h 2865600"/>
               </a:gdLst>
               <a:ahLst/>
               <a:rect l="textAreaLeft" t="textAreaTop" r="textAreaRight" b="textAreaBottom"/>
@@ -24269,7 +24269,7 @@
         <p:spPr>
           <a:xfrm>
             <a:off x="788760" y="1850400"/>
-            <a:ext cx="1477080" cy="627120"/>
+            <a:ext cx="1476720" cy="627120"/>
           </a:xfrm>
           <a:prstGeom prst="rect">
             <a:avLst/>
@@ -24434,7 +24434,7 @@
               <a:t>Toutes</a:t>
             </a:r>
             <a:r>
-              <a:rPr b="0" lang="fr-FR" sz="1100" spc="256" strike="noStrike">
+              <a:rPr b="0" lang="fr-FR" sz="1100" spc="253" strike="noStrike">
                 <a:solidFill>
                   <a:srgbClr val="ffffff"/>
                 </a:solidFill>
@@ -24491,7 +24491,7 @@
         <p:spPr>
           <a:xfrm>
             <a:off x="788760" y="2634120"/>
-            <a:ext cx="1621800" cy="470520"/>
+            <a:ext cx="1621440" cy="470520"/>
           </a:xfrm>
           <a:prstGeom prst="rect">
             <a:avLst/>
@@ -24677,7 +24677,7 @@
         <p:spPr>
           <a:xfrm>
             <a:off x="788760" y="3261960"/>
-            <a:ext cx="1656360" cy="180360"/>
+            <a:ext cx="1656000" cy="180360"/>
           </a:xfrm>
           <a:prstGeom prst="rect">
             <a:avLst/>
@@ -24833,15 +24833,15 @@
         <p:spPr>
           <a:xfrm>
             <a:off x="2854080" y="2973600"/>
-            <a:ext cx="415440" cy="486360"/>
+            <a:ext cx="415080" cy="486000"/>
           </a:xfrm>
           <a:custGeom>
             <a:avLst/>
             <a:gdLst>
-              <a:gd name="textAreaLeft" fmla="*/ 0 w 415440"/>
-              <a:gd name="textAreaRight" fmla="*/ 417240 w 415440"/>
-              <a:gd name="textAreaTop" fmla="*/ 0 h 486360"/>
-              <a:gd name="textAreaBottom" fmla="*/ 488160 h 486360"/>
+              <a:gd name="textAreaLeft" fmla="*/ 0 w 415080"/>
+              <a:gd name="textAreaRight" fmla="*/ 417240 w 415080"/>
+              <a:gd name="textAreaTop" fmla="*/ 0 h 486000"/>
+              <a:gd name="textAreaBottom" fmla="*/ 488160 h 486000"/>
             </a:gdLst>
             <a:ahLst/>
             <a:rect l="textAreaLeft" t="textAreaTop" r="textAreaRight" b="textAreaBottom"/>
@@ -24917,9 +24917,9 @@
         <p:grpSpPr>
           <a:xfrm>
             <a:off x="3444480" y="1793520"/>
-            <a:ext cx="1965600" cy="2846880"/>
+            <a:ext cx="1965240" cy="2846520"/>
             <a:chOff x="3444480" y="1793520"/>
-            <a:chExt cx="1965600" cy="2846880"/>
+            <a:chExt cx="1965240" cy="2846520"/>
           </a:xfrm>
         </p:grpSpPr>
         <p:sp>
@@ -24931,15 +24931,15 @@
           <p:spPr>
             <a:xfrm>
               <a:off x="3444480" y="1793520"/>
-              <a:ext cx="1965600" cy="2846880"/>
+              <a:ext cx="1965240" cy="2846520"/>
             </a:xfrm>
             <a:custGeom>
               <a:avLst/>
               <a:gdLst>
-                <a:gd name="textAreaLeft" fmla="*/ 0 w 1965600"/>
-                <a:gd name="textAreaRight" fmla="*/ 1967400 w 1965600"/>
-                <a:gd name="textAreaTop" fmla="*/ 0 h 2846880"/>
-                <a:gd name="textAreaBottom" fmla="*/ 2848680 h 2846880"/>
+                <a:gd name="textAreaLeft" fmla="*/ 0 w 1965240"/>
+                <a:gd name="textAreaRight" fmla="*/ 1967400 w 1965240"/>
+                <a:gd name="textAreaTop" fmla="*/ 0 h 2846520"/>
+                <a:gd name="textAreaBottom" fmla="*/ 2848680 h 2846520"/>
               </a:gdLst>
               <a:ahLst/>
               <a:rect l="textAreaLeft" t="textAreaTop" r="textAreaRight" b="textAreaBottom"/>
@@ -25090,15 +25090,15 @@
           <p:spPr>
             <a:xfrm>
               <a:off x="3444480" y="1793520"/>
-              <a:ext cx="1965600" cy="2846880"/>
+              <a:ext cx="1965240" cy="2846520"/>
             </a:xfrm>
             <a:custGeom>
               <a:avLst/>
               <a:gdLst>
-                <a:gd name="textAreaLeft" fmla="*/ 0 w 1965600"/>
-                <a:gd name="textAreaRight" fmla="*/ 1967400 w 1965600"/>
-                <a:gd name="textAreaTop" fmla="*/ 0 h 2846880"/>
-                <a:gd name="textAreaBottom" fmla="*/ 2848680 h 2846880"/>
+                <a:gd name="textAreaLeft" fmla="*/ 0 w 1965240"/>
+                <a:gd name="textAreaRight" fmla="*/ 1967400 w 1965240"/>
+                <a:gd name="textAreaTop" fmla="*/ 0 h 2846520"/>
+                <a:gd name="textAreaBottom" fmla="*/ 2848680 h 2846520"/>
               </a:gdLst>
               <a:ahLst/>
               <a:rect l="textAreaLeft" t="textAreaTop" r="textAreaRight" b="textAreaBottom"/>
@@ -25251,7 +25251,7 @@
         <p:spPr>
           <a:xfrm>
             <a:off x="3543120" y="1860120"/>
-            <a:ext cx="1477800" cy="772560"/>
+            <a:ext cx="1477440" cy="772560"/>
           </a:xfrm>
           <a:prstGeom prst="rect">
             <a:avLst/>
@@ -25463,7 +25463,7 @@
         <p:spPr>
           <a:xfrm>
             <a:off x="3543120" y="2788200"/>
-            <a:ext cx="1622520" cy="466920"/>
+            <a:ext cx="1622160" cy="466920"/>
           </a:xfrm>
           <a:prstGeom prst="rect">
             <a:avLst/>
@@ -25649,7 +25649,7 @@
         <p:spPr>
           <a:xfrm>
             <a:off x="3543120" y="3414960"/>
-            <a:ext cx="1309320" cy="325800"/>
+            <a:ext cx="1308960" cy="325800"/>
           </a:xfrm>
           <a:prstGeom prst="rect">
             <a:avLst/>
@@ -25785,15 +25785,15 @@
         <p:spPr>
           <a:xfrm>
             <a:off x="5608440" y="2973600"/>
-            <a:ext cx="415440" cy="486360"/>
+            <a:ext cx="415080" cy="486000"/>
           </a:xfrm>
           <a:custGeom>
             <a:avLst/>
             <a:gdLst>
-              <a:gd name="textAreaLeft" fmla="*/ 0 w 415440"/>
-              <a:gd name="textAreaRight" fmla="*/ 417240 w 415440"/>
-              <a:gd name="textAreaTop" fmla="*/ 0 h 486360"/>
-              <a:gd name="textAreaBottom" fmla="*/ 488160 h 486360"/>
+              <a:gd name="textAreaLeft" fmla="*/ 0 w 415080"/>
+              <a:gd name="textAreaRight" fmla="*/ 417240 w 415080"/>
+              <a:gd name="textAreaTop" fmla="*/ 0 h 486000"/>
+              <a:gd name="textAreaBottom" fmla="*/ 488160 h 486000"/>
             </a:gdLst>
             <a:ahLst/>
             <a:rect l="textAreaLeft" t="textAreaTop" r="textAreaRight" b="textAreaBottom"/>
@@ -25869,9 +25869,9 @@
         <p:grpSpPr>
           <a:xfrm>
             <a:off x="6198480" y="1793520"/>
-            <a:ext cx="1965960" cy="2846880"/>
+            <a:ext cx="1965600" cy="2846520"/>
             <a:chOff x="6198480" y="1793520"/>
-            <a:chExt cx="1965960" cy="2846880"/>
+            <a:chExt cx="1965600" cy="2846520"/>
           </a:xfrm>
         </p:grpSpPr>
         <p:sp>
@@ -25883,15 +25883,15 @@
           <p:spPr>
             <a:xfrm>
               <a:off x="6198480" y="1793520"/>
-              <a:ext cx="1965960" cy="2846880"/>
+              <a:ext cx="1965600" cy="2846520"/>
             </a:xfrm>
             <a:custGeom>
               <a:avLst/>
               <a:gdLst>
-                <a:gd name="textAreaLeft" fmla="*/ 0 w 1965960"/>
-                <a:gd name="textAreaRight" fmla="*/ 1967760 w 1965960"/>
-                <a:gd name="textAreaTop" fmla="*/ 0 h 2846880"/>
-                <a:gd name="textAreaBottom" fmla="*/ 2848680 h 2846880"/>
+                <a:gd name="textAreaLeft" fmla="*/ 0 w 1965600"/>
+                <a:gd name="textAreaRight" fmla="*/ 1967760 w 1965600"/>
+                <a:gd name="textAreaTop" fmla="*/ 0 h 2846520"/>
+                <a:gd name="textAreaBottom" fmla="*/ 2848680 h 2846520"/>
               </a:gdLst>
               <a:ahLst/>
               <a:rect l="textAreaLeft" t="textAreaTop" r="textAreaRight" b="textAreaBottom"/>
@@ -26042,15 +26042,15 @@
           <p:spPr>
             <a:xfrm>
               <a:off x="6198480" y="1793520"/>
-              <a:ext cx="1965960" cy="2846880"/>
+              <a:ext cx="1965600" cy="2846520"/>
             </a:xfrm>
             <a:custGeom>
               <a:avLst/>
               <a:gdLst>
-                <a:gd name="textAreaLeft" fmla="*/ 0 w 1965960"/>
-                <a:gd name="textAreaRight" fmla="*/ 1967760 w 1965960"/>
-                <a:gd name="textAreaTop" fmla="*/ 0 h 2846880"/>
-                <a:gd name="textAreaBottom" fmla="*/ 2848680 h 2846880"/>
+                <a:gd name="textAreaLeft" fmla="*/ 0 w 1965600"/>
+                <a:gd name="textAreaRight" fmla="*/ 1967760 w 1965600"/>
+                <a:gd name="textAreaTop" fmla="*/ 0 h 2846520"/>
+                <a:gd name="textAreaBottom" fmla="*/ 2848680 h 2846520"/>
               </a:gdLst>
               <a:ahLst/>
               <a:rect l="textAreaLeft" t="textAreaTop" r="textAreaRight" b="textAreaBottom"/>
@@ -26203,7 +26203,7 @@
         <p:spPr>
           <a:xfrm>
             <a:off x="6272640" y="1860120"/>
-            <a:ext cx="1742400" cy="917280"/>
+            <a:ext cx="1742040" cy="917280"/>
           </a:xfrm>
           <a:prstGeom prst="rect">
             <a:avLst/>
@@ -26445,7 +26445,7 @@
         <p:spPr>
           <a:xfrm>
             <a:off x="6297840" y="2933280"/>
-            <a:ext cx="1621800" cy="325800"/>
+            <a:ext cx="1621440" cy="325800"/>
           </a:xfrm>
           <a:prstGeom prst="rect">
             <a:avLst/>
@@ -26601,7 +26601,7 @@
         <p:spPr>
           <a:xfrm>
             <a:off x="6297840" y="3414960"/>
-            <a:ext cx="1231200" cy="325800"/>
+            <a:ext cx="1230840" cy="325800"/>
           </a:xfrm>
           <a:prstGeom prst="rect">
             <a:avLst/>
@@ -26767,7 +26767,7 @@
         <p:spPr>
           <a:xfrm>
             <a:off x="801000" y="2264400"/>
-            <a:ext cx="6583680" cy="1474560"/>
+            <a:ext cx="6583320" cy="1474560"/>
           </a:xfrm>
           <a:prstGeom prst="rect">
             <a:avLst/>
@@ -26894,7 +26894,7 @@
         <p:spPr>
           <a:xfrm>
             <a:off x="801000" y="3882240"/>
-            <a:ext cx="5289480" cy="378000"/>
+            <a:ext cx="5289120" cy="378000"/>
           </a:xfrm>
           <a:prstGeom prst="rect">
             <a:avLst/>
@@ -27021,7 +27021,7 @@
         <p:spPr>
           <a:xfrm>
             <a:off x="7700040" y="27000"/>
-            <a:ext cx="221760" cy="226080"/>
+            <a:ext cx="221400" cy="226080"/>
           </a:xfrm>
           <a:prstGeom prst="rect">
             <a:avLst/>
@@ -27112,7 +27112,7 @@
         <p:spPr>
           <a:xfrm>
             <a:off x="5194440" y="2130840"/>
-            <a:ext cx="3294000" cy="1207800"/>
+            <a:ext cx="3293640" cy="1207440"/>
           </a:xfrm>
           <a:prstGeom prst="rect">
             <a:avLst/>
@@ -27131,9 +27131,9 @@
         <p:grpSpPr>
           <a:xfrm>
             <a:off x="513000" y="1686240"/>
-            <a:ext cx="4469400" cy="3012840"/>
+            <a:ext cx="4469040" cy="3012480"/>
             <a:chOff x="513000" y="1686240"/>
-            <a:chExt cx="4469400" cy="3012840"/>
+            <a:chExt cx="4469040" cy="3012480"/>
           </a:xfrm>
         </p:grpSpPr>
         <p:pic>
@@ -27149,7 +27149,7 @@
           <p:spPr>
             <a:xfrm>
               <a:off x="513000" y="1686240"/>
-              <a:ext cx="4469400" cy="2812680"/>
+              <a:ext cx="4469040" cy="2812320"/>
             </a:xfrm>
             <a:prstGeom prst="rect">
               <a:avLst/>
@@ -27168,15 +27168,15 @@
           <p:spPr>
             <a:xfrm>
               <a:off x="1091160" y="2386440"/>
-              <a:ext cx="1731600" cy="2312640"/>
+              <a:ext cx="1731240" cy="2312280"/>
             </a:xfrm>
             <a:custGeom>
               <a:avLst/>
               <a:gdLst>
-                <a:gd name="textAreaLeft" fmla="*/ 0 w 1731600"/>
-                <a:gd name="textAreaRight" fmla="*/ 1733400 w 1731600"/>
-                <a:gd name="textAreaTop" fmla="*/ 0 h 2312640"/>
-                <a:gd name="textAreaBottom" fmla="*/ 2314440 h 2312640"/>
+                <a:gd name="textAreaLeft" fmla="*/ 0 w 1731240"/>
+                <a:gd name="textAreaRight" fmla="*/ 1733400 w 1731240"/>
+                <a:gd name="textAreaTop" fmla="*/ 0 h 2312280"/>
+                <a:gd name="textAreaBottom" fmla="*/ 2314440 h 2312280"/>
               </a:gdLst>
               <a:ahLst/>
               <a:rect l="textAreaLeft" t="textAreaTop" r="textAreaRight" b="textAreaBottom"/>
@@ -27255,7 +27255,7 @@
         <p:spPr>
           <a:xfrm>
             <a:off x="536040" y="319320"/>
-            <a:ext cx="8283600" cy="1804680"/>
+            <a:ext cx="8283240" cy="1804320"/>
           </a:xfrm>
           <a:prstGeom prst="rect">
             <a:avLst/>
@@ -27479,7 +27479,7 @@
         <p:spPr>
           <a:xfrm>
             <a:off x="7700040" y="27000"/>
-            <a:ext cx="221760" cy="226080"/>
+            <a:ext cx="221400" cy="226080"/>
           </a:xfrm>
           <a:prstGeom prst="rect">
             <a:avLst/>
@@ -27536,15 +27536,15 @@
         <p:spPr>
           <a:xfrm>
             <a:off x="5220000" y="2641320"/>
-            <a:ext cx="3249360" cy="214560"/>
+            <a:ext cx="3249000" cy="214200"/>
           </a:xfrm>
           <a:custGeom>
             <a:avLst/>
             <a:gdLst>
-              <a:gd name="textAreaLeft" fmla="*/ 0 w 3249360"/>
-              <a:gd name="textAreaRight" fmla="*/ 3251160 w 3249360"/>
-              <a:gd name="textAreaTop" fmla="*/ 0 h 214560"/>
-              <a:gd name="textAreaBottom" fmla="*/ 216360 h 214560"/>
+              <a:gd name="textAreaLeft" fmla="*/ 0 w 3249000"/>
+              <a:gd name="textAreaRight" fmla="*/ 3251160 w 3249000"/>
+              <a:gd name="textAreaTop" fmla="*/ 0 h 214200"/>
+              <a:gd name="textAreaBottom" fmla="*/ 216360 h 214200"/>
             </a:gdLst>
             <a:ahLst/>
             <a:rect l="textAreaLeft" t="textAreaTop" r="textAreaRight" b="textAreaBottom"/>
@@ -27616,7 +27616,7 @@
         <p:spPr>
           <a:xfrm>
             <a:off x="5431320" y="3701520"/>
-            <a:ext cx="2693160" cy="1989000"/>
+            <a:ext cx="2692800" cy="1988640"/>
           </a:xfrm>
           <a:prstGeom prst="rect">
             <a:avLst/>
@@ -27665,9 +27665,9 @@
         <p:grpSpPr>
           <a:xfrm>
             <a:off x="21960" y="1914840"/>
-            <a:ext cx="9063360" cy="3538800"/>
+            <a:ext cx="9063000" cy="3538440"/>
             <a:chOff x="21960" y="1914840"/>
-            <a:chExt cx="9063360" cy="3538800"/>
+            <a:chExt cx="9063000" cy="3538440"/>
           </a:xfrm>
         </p:grpSpPr>
         <p:pic>
@@ -27683,7 +27683,7 @@
           <p:spPr>
             <a:xfrm>
               <a:off x="21960" y="1914840"/>
-              <a:ext cx="8998560" cy="3538800"/>
+              <a:ext cx="8998200" cy="3538440"/>
             </a:xfrm>
             <a:prstGeom prst="rect">
               <a:avLst/>
@@ -27702,15 +27702,15 @@
           <p:spPr>
             <a:xfrm>
               <a:off x="4971960" y="2425320"/>
-              <a:ext cx="2406600" cy="2392920"/>
+              <a:ext cx="2406240" cy="2392560"/>
             </a:xfrm>
             <a:custGeom>
               <a:avLst/>
               <a:gdLst>
-                <a:gd name="textAreaLeft" fmla="*/ 0 w 2406600"/>
-                <a:gd name="textAreaRight" fmla="*/ 2408400 w 2406600"/>
-                <a:gd name="textAreaTop" fmla="*/ 0 h 2392920"/>
-                <a:gd name="textAreaBottom" fmla="*/ 2394720 h 2392920"/>
+                <a:gd name="textAreaLeft" fmla="*/ 0 w 2406240"/>
+                <a:gd name="textAreaRight" fmla="*/ 2408400 w 2406240"/>
+                <a:gd name="textAreaTop" fmla="*/ 0 h 2392560"/>
+                <a:gd name="textAreaBottom" fmla="*/ 2394720 h 2392560"/>
               </a:gdLst>
               <a:ahLst/>
               <a:rect l="textAreaLeft" t="textAreaTop" r="textAreaRight" b="textAreaBottom"/>
@@ -27768,15 +27768,15 @@
           <p:spPr>
             <a:xfrm>
               <a:off x="6959880" y="2601360"/>
-              <a:ext cx="2125440" cy="2258640"/>
+              <a:ext cx="2125080" cy="2258280"/>
             </a:xfrm>
             <a:custGeom>
               <a:avLst/>
               <a:gdLst>
-                <a:gd name="textAreaLeft" fmla="*/ 0 w 2125440"/>
-                <a:gd name="textAreaRight" fmla="*/ 2127240 w 2125440"/>
-                <a:gd name="textAreaTop" fmla="*/ 0 h 2258640"/>
-                <a:gd name="textAreaBottom" fmla="*/ 2260440 h 2258640"/>
+                <a:gd name="textAreaLeft" fmla="*/ 0 w 2125080"/>
+                <a:gd name="textAreaRight" fmla="*/ 2127240 w 2125080"/>
+                <a:gd name="textAreaTop" fmla="*/ 0 h 2258280"/>
+                <a:gd name="textAreaBottom" fmla="*/ 2260440 h 2258280"/>
               </a:gdLst>
               <a:ahLst/>
               <a:rect l="textAreaLeft" t="textAreaTop" r="textAreaRight" b="textAreaBottom"/>
@@ -28276,15 +28276,15 @@
           <p:spPr>
             <a:xfrm>
               <a:off x="3291480" y="3217680"/>
-              <a:ext cx="1063080" cy="449640"/>
+              <a:ext cx="1062720" cy="449280"/>
             </a:xfrm>
             <a:custGeom>
               <a:avLst/>
               <a:gdLst>
-                <a:gd name="textAreaLeft" fmla="*/ 0 w 1063080"/>
-                <a:gd name="textAreaRight" fmla="*/ 1064880 w 1063080"/>
-                <a:gd name="textAreaTop" fmla="*/ 0 h 449640"/>
-                <a:gd name="textAreaBottom" fmla="*/ 451440 h 449640"/>
+                <a:gd name="textAreaLeft" fmla="*/ 0 w 1062720"/>
+                <a:gd name="textAreaRight" fmla="*/ 1064880 w 1062720"/>
+                <a:gd name="textAreaTop" fmla="*/ 0 h 449280"/>
+                <a:gd name="textAreaBottom" fmla="*/ 451440 h 449280"/>
               </a:gdLst>
               <a:ahLst/>
               <a:rect l="textAreaLeft" t="textAreaTop" r="textAreaRight" b="textAreaBottom"/>
@@ -28360,15 +28360,15 @@
           <p:spPr>
             <a:xfrm>
               <a:off x="3291480" y="3217680"/>
-              <a:ext cx="1063080" cy="449640"/>
+              <a:ext cx="1062720" cy="449280"/>
             </a:xfrm>
             <a:custGeom>
               <a:avLst/>
               <a:gdLst>
-                <a:gd name="textAreaLeft" fmla="*/ 0 w 1063080"/>
-                <a:gd name="textAreaRight" fmla="*/ 1064880 w 1063080"/>
-                <a:gd name="textAreaTop" fmla="*/ 0 h 449640"/>
-                <a:gd name="textAreaBottom" fmla="*/ 451440 h 449640"/>
+                <a:gd name="textAreaLeft" fmla="*/ 0 w 1062720"/>
+                <a:gd name="textAreaRight" fmla="*/ 1064880 w 1062720"/>
+                <a:gd name="textAreaTop" fmla="*/ 0 h 449280"/>
+                <a:gd name="textAreaBottom" fmla="*/ 451440 h 449280"/>
               </a:gdLst>
               <a:ahLst/>
               <a:rect l="textAreaLeft" t="textAreaTop" r="textAreaRight" b="textAreaBottom"/>
@@ -28450,7 +28450,7 @@
         <p:spPr>
           <a:xfrm>
             <a:off x="536040" y="526320"/>
-            <a:ext cx="7740000" cy="965160"/>
+            <a:ext cx="7739640" cy="964800"/>
           </a:xfrm>
           <a:prstGeom prst="rect">
             <a:avLst/>
@@ -28540,7 +28540,7 @@
         <p:spPr>
           <a:xfrm>
             <a:off x="536040" y="1359360"/>
-            <a:ext cx="2850120" cy="378000"/>
+            <a:ext cx="2849760" cy="378000"/>
           </a:xfrm>
           <a:prstGeom prst="rect">
             <a:avLst/>
@@ -28646,7 +28646,7 @@
         <p:spPr>
           <a:xfrm>
             <a:off x="7700040" y="27000"/>
-            <a:ext cx="221760" cy="226080"/>
+            <a:ext cx="221400" cy="226080"/>
           </a:xfrm>
           <a:prstGeom prst="rect">
             <a:avLst/>
@@ -28703,7 +28703,7 @@
         <p:spPr>
           <a:xfrm>
             <a:off x="3499200" y="3273840"/>
-            <a:ext cx="416160" cy="286560"/>
+            <a:ext cx="415800" cy="286560"/>
           </a:xfrm>
           <a:prstGeom prst="rect">
             <a:avLst/>
@@ -28794,7 +28794,7 @@
         <p:spPr>
           <a:xfrm>
             <a:off x="536040" y="526320"/>
-            <a:ext cx="7740000" cy="965160"/>
+            <a:ext cx="7739640" cy="964800"/>
           </a:xfrm>
           <a:prstGeom prst="rect">
             <a:avLst/>
@@ -28924,7 +28924,7 @@
         <p:spPr>
           <a:xfrm>
             <a:off x="536040" y="1359360"/>
-            <a:ext cx="8018280" cy="3909240"/>
+            <a:ext cx="8017920" cy="3908880"/>
           </a:xfrm>
           <a:prstGeom prst="rect">
             <a:avLst/>
@@ -29373,7 +29373,7 @@
               </a:spcBef>
               <a:buNone/>
               <a:tabLst>
-                <a:tab algn="l" pos="195480"/>
+                <a:tab algn="l" pos="0"/>
               </a:tabLst>
             </a:pPr>
             <a:endParaRPr b="0" lang="fr-FR" sz="2400" spc="-1" strike="noStrike">
@@ -29444,7 +29444,7 @@
               <a:t>réaliser</a:t>
             </a:r>
             <a:r>
-              <a:rPr b="0" lang="fr-FR" sz="2400" spc="7" strike="noStrike">
+              <a:rPr b="0" lang="fr-FR" sz="2400" spc="4" strike="noStrike">
                 <a:solidFill>
                   <a:srgbClr val="292934"/>
                 </a:solidFill>
@@ -29664,7 +29664,7 @@
         <p:spPr>
           <a:xfrm>
             <a:off x="7700040" y="27000"/>
-            <a:ext cx="221760" cy="226080"/>
+            <a:ext cx="221400" cy="226080"/>
           </a:xfrm>
           <a:prstGeom prst="rect">
             <a:avLst/>
@@ -29755,7 +29755,7 @@
         <p:spPr>
           <a:xfrm>
             <a:off x="536040" y="526320"/>
-            <a:ext cx="7740000" cy="965160"/>
+            <a:ext cx="7739640" cy="964800"/>
           </a:xfrm>
           <a:prstGeom prst="rect">
             <a:avLst/>
@@ -29809,7 +29809,7 @@
         <p:spPr>
           <a:xfrm>
             <a:off x="536040" y="1357560"/>
-            <a:ext cx="5763240" cy="3588120"/>
+            <a:ext cx="5762880" cy="3588120"/>
           </a:xfrm>
           <a:prstGeom prst="rect">
             <a:avLst/>
@@ -30278,7 +30278,7 @@
         <p:spPr>
           <a:xfrm>
             <a:off x="7700040" y="27000"/>
-            <a:ext cx="123120" cy="226080"/>
+            <a:ext cx="122760" cy="226080"/>
           </a:xfrm>
           <a:prstGeom prst="rect">
             <a:avLst/>
@@ -30369,7 +30369,7 @@
         <p:spPr>
           <a:xfrm>
             <a:off x="536040" y="526320"/>
-            <a:ext cx="7740000" cy="965160"/>
+            <a:ext cx="7739640" cy="964800"/>
           </a:xfrm>
           <a:prstGeom prst="rect">
             <a:avLst/>
@@ -30477,7 +30477,7 @@
         <p:spPr>
           <a:xfrm>
             <a:off x="536040" y="1359360"/>
-            <a:ext cx="4646880" cy="378000"/>
+            <a:ext cx="4646520" cy="378000"/>
           </a:xfrm>
           <a:prstGeom prst="rect">
             <a:avLst/>
@@ -30603,7 +30603,7 @@
         <p:spPr>
           <a:xfrm>
             <a:off x="7700040" y="27000"/>
-            <a:ext cx="221760" cy="226080"/>
+            <a:ext cx="221400" cy="226080"/>
           </a:xfrm>
           <a:prstGeom prst="rect">
             <a:avLst/>
@@ -30660,9 +30660,9 @@
         <p:grpSpPr>
           <a:xfrm>
             <a:off x="5990040" y="3270600"/>
-            <a:ext cx="512640" cy="885240"/>
+            <a:ext cx="512280" cy="884880"/>
             <a:chOff x="5990040" y="3270600"/>
-            <a:chExt cx="512640" cy="885240"/>
+            <a:chExt cx="512280" cy="884880"/>
           </a:xfrm>
         </p:grpSpPr>
         <p:pic>
@@ -30678,7 +30678,7 @@
           <p:spPr>
             <a:xfrm>
               <a:off x="6305760" y="3613320"/>
-              <a:ext cx="196920" cy="196920"/>
+              <a:ext cx="196560" cy="196560"/>
             </a:xfrm>
             <a:prstGeom prst="rect">
               <a:avLst/>
@@ -30701,7 +30701,7 @@
           <p:spPr>
             <a:xfrm>
               <a:off x="5990040" y="3613320"/>
-              <a:ext cx="196920" cy="196920"/>
+              <a:ext cx="196560" cy="196560"/>
             </a:xfrm>
             <a:prstGeom prst="rect">
               <a:avLst/>
@@ -30720,15 +30720,15 @@
           <p:spPr>
             <a:xfrm>
               <a:off x="6037920" y="3270600"/>
-              <a:ext cx="171000" cy="171000"/>
+              <a:ext cx="170640" cy="170640"/>
             </a:xfrm>
             <a:custGeom>
               <a:avLst/>
               <a:gdLst>
-                <a:gd name="textAreaLeft" fmla="*/ 0 w 171000"/>
-                <a:gd name="textAreaRight" fmla="*/ 172800 w 171000"/>
-                <a:gd name="textAreaTop" fmla="*/ 0 h 171000"/>
-                <a:gd name="textAreaBottom" fmla="*/ 172800 h 171000"/>
+                <a:gd name="textAreaLeft" fmla="*/ 0 w 170640"/>
+                <a:gd name="textAreaRight" fmla="*/ 172800 w 170640"/>
+                <a:gd name="textAreaTop" fmla="*/ 0 h 170640"/>
+                <a:gd name="textAreaBottom" fmla="*/ 172800 h 170640"/>
               </a:gdLst>
               <a:ahLst/>
               <a:rect l="textAreaLeft" t="textAreaTop" r="textAreaRight" b="textAreaBottom"/>
@@ -30831,15 +30831,15 @@
           <p:spPr>
             <a:xfrm>
               <a:off x="6037920" y="3270600"/>
-              <a:ext cx="171000" cy="171000"/>
+              <a:ext cx="170640" cy="170640"/>
             </a:xfrm>
             <a:custGeom>
               <a:avLst/>
               <a:gdLst>
-                <a:gd name="textAreaLeft" fmla="*/ 0 w 171000"/>
-                <a:gd name="textAreaRight" fmla="*/ 172800 w 171000"/>
-                <a:gd name="textAreaTop" fmla="*/ 0 h 171000"/>
-                <a:gd name="textAreaBottom" fmla="*/ 172800 h 171000"/>
+                <a:gd name="textAreaLeft" fmla="*/ 0 w 170640"/>
+                <a:gd name="textAreaRight" fmla="*/ 172800 w 170640"/>
+                <a:gd name="textAreaTop" fmla="*/ 0 h 170640"/>
+                <a:gd name="textAreaBottom" fmla="*/ 172800 h 170640"/>
               </a:gdLst>
               <a:ahLst/>
               <a:rect l="textAreaLeft" t="textAreaTop" r="textAreaRight" b="textAreaBottom"/>
@@ -30943,15 +30943,15 @@
           <p:spPr>
             <a:xfrm>
               <a:off x="6192360" y="3425400"/>
-              <a:ext cx="171000" cy="171000"/>
+              <a:ext cx="170640" cy="170640"/>
             </a:xfrm>
             <a:custGeom>
               <a:avLst/>
               <a:gdLst>
-                <a:gd name="textAreaLeft" fmla="*/ 0 w 171000"/>
-                <a:gd name="textAreaRight" fmla="*/ 172800 w 171000"/>
-                <a:gd name="textAreaTop" fmla="*/ 0 h 171000"/>
-                <a:gd name="textAreaBottom" fmla="*/ 172800 h 171000"/>
+                <a:gd name="textAreaLeft" fmla="*/ 0 w 170640"/>
+                <a:gd name="textAreaRight" fmla="*/ 172800 w 170640"/>
+                <a:gd name="textAreaTop" fmla="*/ 0 h 170640"/>
+                <a:gd name="textAreaBottom" fmla="*/ 172800 h 170640"/>
               </a:gdLst>
               <a:ahLst/>
               <a:rect l="textAreaLeft" t="textAreaTop" r="textAreaRight" b="textAreaBottom"/>
@@ -31054,15 +31054,15 @@
           <p:spPr>
             <a:xfrm>
               <a:off x="6192360" y="3425400"/>
-              <a:ext cx="171000" cy="171000"/>
+              <a:ext cx="170640" cy="170640"/>
             </a:xfrm>
             <a:custGeom>
               <a:avLst/>
               <a:gdLst>
-                <a:gd name="textAreaLeft" fmla="*/ 0 w 171000"/>
-                <a:gd name="textAreaRight" fmla="*/ 172800 w 171000"/>
-                <a:gd name="textAreaTop" fmla="*/ 0 h 171000"/>
-                <a:gd name="textAreaBottom" fmla="*/ 172800 h 171000"/>
+                <a:gd name="textAreaLeft" fmla="*/ 0 w 170640"/>
+                <a:gd name="textAreaRight" fmla="*/ 172800 w 170640"/>
+                <a:gd name="textAreaTop" fmla="*/ 0 h 170640"/>
+                <a:gd name="textAreaBottom" fmla="*/ 172800 h 170640"/>
               </a:gdLst>
               <a:ahLst/>
               <a:rect l="textAreaLeft" t="textAreaTop" r="textAreaRight" b="textAreaBottom"/>
@@ -31166,15 +31166,15 @@
           <p:spPr>
             <a:xfrm>
               <a:off x="6037920" y="3984840"/>
-              <a:ext cx="171000" cy="171000"/>
+              <a:ext cx="170640" cy="170640"/>
             </a:xfrm>
             <a:custGeom>
               <a:avLst/>
               <a:gdLst>
-                <a:gd name="textAreaLeft" fmla="*/ 0 w 171000"/>
-                <a:gd name="textAreaRight" fmla="*/ 172800 w 171000"/>
-                <a:gd name="textAreaTop" fmla="*/ 0 h 171000"/>
-                <a:gd name="textAreaBottom" fmla="*/ 172800 h 171000"/>
+                <a:gd name="textAreaLeft" fmla="*/ 0 w 170640"/>
+                <a:gd name="textAreaRight" fmla="*/ 172800 w 170640"/>
+                <a:gd name="textAreaTop" fmla="*/ 0 h 170640"/>
+                <a:gd name="textAreaBottom" fmla="*/ 172800 h 170640"/>
               </a:gdLst>
               <a:ahLst/>
               <a:rect l="textAreaLeft" t="textAreaTop" r="textAreaRight" b="textAreaBottom"/>
@@ -31277,15 +31277,15 @@
           <p:spPr>
             <a:xfrm>
               <a:off x="6037920" y="3984840"/>
-              <a:ext cx="171000" cy="171000"/>
+              <a:ext cx="170640" cy="170640"/>
             </a:xfrm>
             <a:custGeom>
               <a:avLst/>
               <a:gdLst>
-                <a:gd name="textAreaLeft" fmla="*/ 0 w 171000"/>
-                <a:gd name="textAreaRight" fmla="*/ 172800 w 171000"/>
-                <a:gd name="textAreaTop" fmla="*/ 0 h 171000"/>
-                <a:gd name="textAreaBottom" fmla="*/ 172800 h 171000"/>
+                <a:gd name="textAreaLeft" fmla="*/ 0 w 170640"/>
+                <a:gd name="textAreaRight" fmla="*/ 172800 w 170640"/>
+                <a:gd name="textAreaTop" fmla="*/ 0 h 170640"/>
+                <a:gd name="textAreaBottom" fmla="*/ 172800 h 170640"/>
               </a:gdLst>
               <a:ahLst/>
               <a:rect l="textAreaLeft" t="textAreaTop" r="textAreaRight" b="textAreaBottom"/>
@@ -31389,15 +31389,15 @@
           <p:spPr>
             <a:xfrm>
               <a:off x="6202080" y="3831120"/>
-              <a:ext cx="171000" cy="171000"/>
+              <a:ext cx="170640" cy="170640"/>
             </a:xfrm>
             <a:custGeom>
               <a:avLst/>
               <a:gdLst>
-                <a:gd name="textAreaLeft" fmla="*/ 0 w 171000"/>
-                <a:gd name="textAreaRight" fmla="*/ 172800 w 171000"/>
-                <a:gd name="textAreaTop" fmla="*/ 0 h 171000"/>
-                <a:gd name="textAreaBottom" fmla="*/ 172800 h 171000"/>
+                <a:gd name="textAreaLeft" fmla="*/ 0 w 170640"/>
+                <a:gd name="textAreaRight" fmla="*/ 172800 w 170640"/>
+                <a:gd name="textAreaTop" fmla="*/ 0 h 170640"/>
+                <a:gd name="textAreaBottom" fmla="*/ 172800 h 170640"/>
               </a:gdLst>
               <a:ahLst/>
               <a:rect l="textAreaLeft" t="textAreaTop" r="textAreaRight" b="textAreaBottom"/>
@@ -31500,15 +31500,15 @@
           <p:spPr>
             <a:xfrm>
               <a:off x="6202080" y="3831120"/>
-              <a:ext cx="171000" cy="171000"/>
+              <a:ext cx="170640" cy="170640"/>
             </a:xfrm>
             <a:custGeom>
               <a:avLst/>
               <a:gdLst>
-                <a:gd name="textAreaLeft" fmla="*/ 0 w 171000"/>
-                <a:gd name="textAreaRight" fmla="*/ 172800 w 171000"/>
-                <a:gd name="textAreaTop" fmla="*/ 0 h 171000"/>
-                <a:gd name="textAreaBottom" fmla="*/ 172800 h 171000"/>
+                <a:gd name="textAreaLeft" fmla="*/ 0 w 170640"/>
+                <a:gd name="textAreaRight" fmla="*/ 172800 w 170640"/>
+                <a:gd name="textAreaTop" fmla="*/ 0 h 170640"/>
+                <a:gd name="textAreaBottom" fmla="*/ 172800 h 170640"/>
               </a:gdLst>
               <a:ahLst/>
               <a:rect l="textAreaLeft" t="textAreaTop" r="textAreaRight" b="textAreaBottom"/>
@@ -31617,7 +31617,7 @@
         <p:spPr>
           <a:xfrm>
             <a:off x="5675040" y="3613320"/>
-            <a:ext cx="196920" cy="196920"/>
+            <a:ext cx="196560" cy="196560"/>
           </a:xfrm>
           <a:prstGeom prst="rect">
             <a:avLst/>
@@ -31640,7 +31640,7 @@
         <p:spPr>
           <a:xfrm>
             <a:off x="5359320" y="3613320"/>
-            <a:ext cx="196920" cy="196920"/>
+            <a:ext cx="196560" cy="196560"/>
           </a:xfrm>
           <a:prstGeom prst="rect">
             <a:avLst/>
@@ -31663,7 +31663,7 @@
         <p:spPr>
           <a:xfrm>
             <a:off x="5043240" y="3613320"/>
-            <a:ext cx="197280" cy="196920"/>
+            <a:ext cx="196920" cy="196560"/>
           </a:xfrm>
           <a:prstGeom prst="rect">
             <a:avLst/>
@@ -31682,9 +31682,9 @@
         <p:grpSpPr>
           <a:xfrm>
             <a:off x="4568760" y="3540240"/>
-            <a:ext cx="343800" cy="343080"/>
+            <a:ext cx="343440" cy="342720"/>
             <a:chOff x="4568760" y="3540240"/>
-            <a:chExt cx="343800" cy="343080"/>
+            <a:chExt cx="343440" cy="342720"/>
           </a:xfrm>
         </p:grpSpPr>
         <p:sp>
@@ -31696,15 +31696,15 @@
           <p:spPr>
             <a:xfrm>
               <a:off x="4568760" y="3540240"/>
-              <a:ext cx="343800" cy="343080"/>
+              <a:ext cx="343440" cy="342720"/>
             </a:xfrm>
             <a:custGeom>
               <a:avLst/>
               <a:gdLst>
-                <a:gd name="textAreaLeft" fmla="*/ 0 w 343800"/>
-                <a:gd name="textAreaRight" fmla="*/ 345600 w 343800"/>
-                <a:gd name="textAreaTop" fmla="*/ 0 h 343080"/>
-                <a:gd name="textAreaBottom" fmla="*/ 344880 h 343080"/>
+                <a:gd name="textAreaLeft" fmla="*/ 0 w 343440"/>
+                <a:gd name="textAreaRight" fmla="*/ 345600 w 343440"/>
+                <a:gd name="textAreaTop" fmla="*/ 0 h 342720"/>
+                <a:gd name="textAreaBottom" fmla="*/ 344880 h 342720"/>
               </a:gdLst>
               <a:ahLst/>
               <a:rect l="textAreaLeft" t="textAreaTop" r="textAreaRight" b="textAreaBottom"/>
@@ -31831,15 +31831,15 @@
           <p:spPr>
             <a:xfrm>
               <a:off x="4568760" y="3540240"/>
-              <a:ext cx="343800" cy="343080"/>
+              <a:ext cx="343440" cy="342720"/>
             </a:xfrm>
             <a:custGeom>
               <a:avLst/>
               <a:gdLst>
-                <a:gd name="textAreaLeft" fmla="*/ 0 w 343800"/>
-                <a:gd name="textAreaRight" fmla="*/ 345600 w 343800"/>
-                <a:gd name="textAreaTop" fmla="*/ 0 h 343080"/>
-                <a:gd name="textAreaBottom" fmla="*/ 344880 h 343080"/>
+                <a:gd name="textAreaLeft" fmla="*/ 0 w 343440"/>
+                <a:gd name="textAreaRight" fmla="*/ 345600 w 343440"/>
+                <a:gd name="textAreaTop" fmla="*/ 0 h 342720"/>
+                <a:gd name="textAreaBottom" fmla="*/ 344880 h 342720"/>
               </a:gdLst>
               <a:ahLst/>
               <a:rect l="textAreaLeft" t="textAreaTop" r="textAreaRight" b="textAreaBottom"/>
@@ -31968,9 +31968,9 @@
         <p:grpSpPr>
           <a:xfrm>
             <a:off x="2694240" y="2837160"/>
-            <a:ext cx="1743120" cy="1743120"/>
+            <a:ext cx="1742760" cy="1742760"/>
             <a:chOff x="2694240" y="2837160"/>
-            <a:chExt cx="1743120" cy="1743120"/>
+            <a:chExt cx="1742760" cy="1742760"/>
           </a:xfrm>
         </p:grpSpPr>
         <p:sp>
@@ -31982,15 +31982,15 @@
           <p:spPr>
             <a:xfrm>
               <a:off x="2694240" y="2837160"/>
-              <a:ext cx="1743120" cy="1743120"/>
+              <a:ext cx="1742760" cy="1742760"/>
             </a:xfrm>
             <a:custGeom>
               <a:avLst/>
               <a:gdLst>
-                <a:gd name="textAreaLeft" fmla="*/ 0 w 1743120"/>
-                <a:gd name="textAreaRight" fmla="*/ 1744920 w 1743120"/>
-                <a:gd name="textAreaTop" fmla="*/ 0 h 1743120"/>
-                <a:gd name="textAreaBottom" fmla="*/ 1744920 h 1743120"/>
+                <a:gd name="textAreaLeft" fmla="*/ 0 w 1742760"/>
+                <a:gd name="textAreaRight" fmla="*/ 1744920 w 1742760"/>
+                <a:gd name="textAreaTop" fmla="*/ 0 h 1742760"/>
+                <a:gd name="textAreaBottom" fmla="*/ 1744920 h 1742760"/>
               </a:gdLst>
               <a:ahLst/>
               <a:rect l="textAreaLeft" t="textAreaTop" r="textAreaRight" b="textAreaBottom"/>
@@ -32405,15 +32405,15 @@
           <p:spPr>
             <a:xfrm>
               <a:off x="2694240" y="2837160"/>
-              <a:ext cx="1743120" cy="1743120"/>
+              <a:ext cx="1742760" cy="1742760"/>
             </a:xfrm>
             <a:custGeom>
               <a:avLst/>
               <a:gdLst>
-                <a:gd name="textAreaLeft" fmla="*/ 0 w 1743120"/>
-                <a:gd name="textAreaRight" fmla="*/ 1744920 w 1743120"/>
-                <a:gd name="textAreaTop" fmla="*/ 0 h 1743120"/>
-                <a:gd name="textAreaBottom" fmla="*/ 1744920 h 1743120"/>
+                <a:gd name="textAreaLeft" fmla="*/ 0 w 1742760"/>
+                <a:gd name="textAreaRight" fmla="*/ 1744920 w 1742760"/>
+                <a:gd name="textAreaTop" fmla="*/ 0 h 1742760"/>
+                <a:gd name="textAreaBottom" fmla="*/ 1744920 h 1742760"/>
               </a:gdLst>
               <a:ahLst/>
               <a:rect l="textAreaLeft" t="textAreaTop" r="textAreaRight" b="textAreaBottom"/>
@@ -32830,7 +32830,7 @@
         <p:spPr>
           <a:xfrm>
             <a:off x="2979000" y="3420360"/>
-            <a:ext cx="1176840" cy="525600"/>
+            <a:ext cx="1176480" cy="525600"/>
           </a:xfrm>
           <a:prstGeom prst="rect">
             <a:avLst/>
@@ -32894,7 +32894,7 @@
         <p:spPr>
           <a:xfrm>
             <a:off x="2211840" y="2269080"/>
-            <a:ext cx="197280" cy="196920"/>
+            <a:ext cx="196920" cy="196560"/>
           </a:xfrm>
           <a:prstGeom prst="rect">
             <a:avLst/>
@@ -32917,7 +32917,7 @@
         <p:spPr>
           <a:xfrm>
             <a:off x="1856520" y="2269080"/>
-            <a:ext cx="196920" cy="196920"/>
+            <a:ext cx="196560" cy="196560"/>
           </a:xfrm>
           <a:prstGeom prst="rect">
             <a:avLst/>
@@ -32940,7 +32940,7 @@
         <p:spPr>
           <a:xfrm>
             <a:off x="1500840" y="2269080"/>
-            <a:ext cx="197280" cy="196920"/>
+            <a:ext cx="196920" cy="196560"/>
           </a:xfrm>
           <a:prstGeom prst="rect">
             <a:avLst/>
@@ -32963,7 +32963,7 @@
         <p:spPr>
           <a:xfrm>
             <a:off x="1145520" y="2269080"/>
-            <a:ext cx="196920" cy="196920"/>
+            <a:ext cx="196560" cy="196560"/>
           </a:xfrm>
           <a:prstGeom prst="rect">
             <a:avLst/>
@@ -32986,7 +32986,7 @@
         <p:spPr>
           <a:xfrm>
             <a:off x="789480" y="2269080"/>
-            <a:ext cx="197280" cy="196920"/>
+            <a:ext cx="196920" cy="196560"/>
           </a:xfrm>
           <a:prstGeom prst="rect">
             <a:avLst/>
@@ -33009,7 +33009,7 @@
         <p:spPr>
           <a:xfrm>
             <a:off x="434160" y="2269080"/>
-            <a:ext cx="197280" cy="196920"/>
+            <a:ext cx="196920" cy="196560"/>
           </a:xfrm>
           <a:prstGeom prst="rect">
             <a:avLst/>
@@ -33028,9 +33028,9 @@
         <p:grpSpPr>
           <a:xfrm>
             <a:off x="2210040" y="2382480"/>
-            <a:ext cx="909360" cy="2815560"/>
+            <a:ext cx="909000" cy="2815200"/>
             <a:chOff x="2210040" y="2382480"/>
-            <a:chExt cx="909360" cy="2815560"/>
+            <a:chExt cx="909000" cy="2815200"/>
           </a:xfrm>
         </p:grpSpPr>
         <p:sp>
@@ -33042,15 +33042,15 @@
           <p:spPr>
             <a:xfrm>
               <a:off x="2775600" y="2556720"/>
-              <a:ext cx="343800" cy="343080"/>
+              <a:ext cx="343440" cy="342720"/>
             </a:xfrm>
             <a:custGeom>
               <a:avLst/>
               <a:gdLst>
-                <a:gd name="textAreaLeft" fmla="*/ 0 w 343800"/>
-                <a:gd name="textAreaRight" fmla="*/ 345600 w 343800"/>
-                <a:gd name="textAreaTop" fmla="*/ 0 h 343080"/>
-                <a:gd name="textAreaBottom" fmla="*/ 344880 h 343080"/>
+                <a:gd name="textAreaLeft" fmla="*/ 0 w 343440"/>
+                <a:gd name="textAreaRight" fmla="*/ 345600 w 343440"/>
+                <a:gd name="textAreaTop" fmla="*/ 0 h 342720"/>
+                <a:gd name="textAreaBottom" fmla="*/ 344880 h 342720"/>
               </a:gdLst>
               <a:ahLst/>
               <a:rect l="textAreaLeft" t="textAreaTop" r="textAreaRight" b="textAreaBottom"/>
@@ -33177,15 +33177,15 @@
           <p:spPr>
             <a:xfrm>
               <a:off x="2775600" y="2556720"/>
-              <a:ext cx="343800" cy="343080"/>
+              <a:ext cx="343440" cy="342720"/>
             </a:xfrm>
             <a:custGeom>
               <a:avLst/>
               <a:gdLst>
-                <a:gd name="textAreaLeft" fmla="*/ 0 w 343800"/>
-                <a:gd name="textAreaRight" fmla="*/ 345600 w 343800"/>
-                <a:gd name="textAreaTop" fmla="*/ 0 h 343080"/>
-                <a:gd name="textAreaBottom" fmla="*/ 344880 h 343080"/>
+                <a:gd name="textAreaLeft" fmla="*/ 0 w 343440"/>
+                <a:gd name="textAreaRight" fmla="*/ 345600 w 343440"/>
+                <a:gd name="textAreaTop" fmla="*/ 0 h 342720"/>
+                <a:gd name="textAreaBottom" fmla="*/ 344880 h 342720"/>
               </a:gdLst>
               <a:ahLst/>
               <a:rect l="textAreaLeft" t="textAreaTop" r="textAreaRight" b="textAreaBottom"/>
@@ -33317,7 +33317,7 @@
           <p:spPr>
             <a:xfrm>
               <a:off x="2567520" y="2382480"/>
-              <a:ext cx="197280" cy="196920"/>
+              <a:ext cx="196920" cy="196560"/>
             </a:xfrm>
             <a:prstGeom prst="rect">
               <a:avLst/>
@@ -33336,15 +33336,15 @@
           <p:spPr>
             <a:xfrm>
               <a:off x="2320560" y="3096720"/>
-              <a:ext cx="343800" cy="343080"/>
+              <a:ext cx="343440" cy="342720"/>
             </a:xfrm>
             <a:custGeom>
               <a:avLst/>
               <a:gdLst>
-                <a:gd name="textAreaLeft" fmla="*/ 0 w 343800"/>
-                <a:gd name="textAreaRight" fmla="*/ 345600 w 343800"/>
-                <a:gd name="textAreaTop" fmla="*/ 0 h 343080"/>
-                <a:gd name="textAreaBottom" fmla="*/ 344880 h 343080"/>
+                <a:gd name="textAreaLeft" fmla="*/ 0 w 343440"/>
+                <a:gd name="textAreaRight" fmla="*/ 345600 w 343440"/>
+                <a:gd name="textAreaTop" fmla="*/ 0 h 342720"/>
+                <a:gd name="textAreaBottom" fmla="*/ 344880 h 342720"/>
               </a:gdLst>
               <a:ahLst/>
               <a:rect l="textAreaLeft" t="textAreaTop" r="textAreaRight" b="textAreaBottom"/>
@@ -33471,15 +33471,15 @@
           <p:spPr>
             <a:xfrm>
               <a:off x="2320560" y="3096720"/>
-              <a:ext cx="343800" cy="343080"/>
+              <a:ext cx="343440" cy="342720"/>
             </a:xfrm>
             <a:custGeom>
               <a:avLst/>
               <a:gdLst>
-                <a:gd name="textAreaLeft" fmla="*/ 0 w 343800"/>
-                <a:gd name="textAreaRight" fmla="*/ 345600 w 343800"/>
-                <a:gd name="textAreaTop" fmla="*/ 0 h 343080"/>
-                <a:gd name="textAreaBottom" fmla="*/ 344880 h 343080"/>
+                <a:gd name="textAreaLeft" fmla="*/ 0 w 343440"/>
+                <a:gd name="textAreaRight" fmla="*/ 345600 w 343440"/>
+                <a:gd name="textAreaTop" fmla="*/ 0 h 342720"/>
+                <a:gd name="textAreaBottom" fmla="*/ 344880 h 342720"/>
               </a:gdLst>
               <a:ahLst/>
               <a:rect l="textAreaLeft" t="textAreaTop" r="textAreaRight" b="textAreaBottom"/>
@@ -33607,15 +33607,15 @@
           <p:spPr>
             <a:xfrm>
               <a:off x="2320560" y="3925080"/>
-              <a:ext cx="343800" cy="343080"/>
+              <a:ext cx="343440" cy="342720"/>
             </a:xfrm>
             <a:custGeom>
               <a:avLst/>
               <a:gdLst>
-                <a:gd name="textAreaLeft" fmla="*/ 0 w 343800"/>
-                <a:gd name="textAreaRight" fmla="*/ 345600 w 343800"/>
-                <a:gd name="textAreaTop" fmla="*/ 0 h 343080"/>
-                <a:gd name="textAreaBottom" fmla="*/ 344880 h 343080"/>
+                <a:gd name="textAreaLeft" fmla="*/ 0 w 343440"/>
+                <a:gd name="textAreaRight" fmla="*/ 345600 w 343440"/>
+                <a:gd name="textAreaTop" fmla="*/ 0 h 342720"/>
+                <a:gd name="textAreaBottom" fmla="*/ 344880 h 342720"/>
               </a:gdLst>
               <a:ahLst/>
               <a:rect l="textAreaLeft" t="textAreaTop" r="textAreaRight" b="textAreaBottom"/>
@@ -33742,15 +33742,15 @@
           <p:spPr>
             <a:xfrm>
               <a:off x="2320560" y="3925080"/>
-              <a:ext cx="343800" cy="343080"/>
+              <a:ext cx="343440" cy="342720"/>
             </a:xfrm>
             <a:custGeom>
               <a:avLst/>
               <a:gdLst>
-                <a:gd name="textAreaLeft" fmla="*/ 0 w 343800"/>
-                <a:gd name="textAreaRight" fmla="*/ 345600 w 343800"/>
-                <a:gd name="textAreaTop" fmla="*/ 0 h 343080"/>
-                <a:gd name="textAreaBottom" fmla="*/ 344880 h 343080"/>
+                <a:gd name="textAreaLeft" fmla="*/ 0 w 343440"/>
+                <a:gd name="textAreaRight" fmla="*/ 345600 w 343440"/>
+                <a:gd name="textAreaTop" fmla="*/ 0 h 342720"/>
+                <a:gd name="textAreaBottom" fmla="*/ 344880 h 342720"/>
               </a:gdLst>
               <a:ahLst/>
               <a:rect l="textAreaLeft" t="textAreaTop" r="textAreaRight" b="textAreaBottom"/>
@@ -33878,15 +33878,15 @@
           <p:spPr>
             <a:xfrm>
               <a:off x="2775600" y="4520520"/>
-              <a:ext cx="343800" cy="343080"/>
+              <a:ext cx="343440" cy="342720"/>
             </a:xfrm>
             <a:custGeom>
               <a:avLst/>
               <a:gdLst>
-                <a:gd name="textAreaLeft" fmla="*/ 0 w 343800"/>
-                <a:gd name="textAreaRight" fmla="*/ 345600 w 343800"/>
-                <a:gd name="textAreaTop" fmla="*/ 0 h 343080"/>
-                <a:gd name="textAreaBottom" fmla="*/ 344880 h 343080"/>
+                <a:gd name="textAreaLeft" fmla="*/ 0 w 343440"/>
+                <a:gd name="textAreaRight" fmla="*/ 345600 w 343440"/>
+                <a:gd name="textAreaTop" fmla="*/ 0 h 342720"/>
+                <a:gd name="textAreaBottom" fmla="*/ 344880 h 342720"/>
               </a:gdLst>
               <a:ahLst/>
               <a:rect l="textAreaLeft" t="textAreaTop" r="textAreaRight" b="textAreaBottom"/>
@@ -34013,15 +34013,15 @@
           <p:spPr>
             <a:xfrm>
               <a:off x="2775600" y="4520520"/>
-              <a:ext cx="343800" cy="343080"/>
+              <a:ext cx="343440" cy="342720"/>
             </a:xfrm>
             <a:custGeom>
               <a:avLst/>
               <a:gdLst>
-                <a:gd name="textAreaLeft" fmla="*/ 0 w 343800"/>
-                <a:gd name="textAreaRight" fmla="*/ 345600 w 343800"/>
-                <a:gd name="textAreaTop" fmla="*/ 0 h 343080"/>
-                <a:gd name="textAreaBottom" fmla="*/ 344880 h 343080"/>
+                <a:gd name="textAreaLeft" fmla="*/ 0 w 343440"/>
+                <a:gd name="textAreaRight" fmla="*/ 345600 w 343440"/>
+                <a:gd name="textAreaTop" fmla="*/ 0 h 342720"/>
+                <a:gd name="textAreaBottom" fmla="*/ 344880 h 342720"/>
               </a:gdLst>
               <a:ahLst/>
               <a:rect l="textAreaLeft" t="textAreaTop" r="textAreaRight" b="textAreaBottom"/>
@@ -34153,7 +34153,7 @@
           <p:spPr>
             <a:xfrm>
               <a:off x="2564640" y="4838040"/>
-              <a:ext cx="197280" cy="197280"/>
+              <a:ext cx="196920" cy="196920"/>
             </a:xfrm>
             <a:prstGeom prst="rect">
               <a:avLst/>
@@ -34176,7 +34176,7 @@
           <p:spPr>
             <a:xfrm>
               <a:off x="2210040" y="5000760"/>
-              <a:ext cx="196920" cy="197280"/>
+              <a:ext cx="196560" cy="196920"/>
             </a:xfrm>
             <a:prstGeom prst="rect">
               <a:avLst/>
@@ -34196,7 +34196,7 @@
         <p:spPr>
           <a:xfrm>
             <a:off x="432360" y="2029680"/>
-            <a:ext cx="1817640" cy="255240"/>
+            <a:ext cx="1817280" cy="255240"/>
           </a:xfrm>
           <a:prstGeom prst="rect">
             <a:avLst/>
@@ -34297,7 +34297,7 @@
         <p:spPr>
           <a:xfrm>
             <a:off x="2021760" y="3154320"/>
-            <a:ext cx="196920" cy="196920"/>
+            <a:ext cx="196560" cy="196560"/>
           </a:xfrm>
           <a:prstGeom prst="rect">
             <a:avLst/>
@@ -34320,7 +34320,7 @@
         <p:spPr>
           <a:xfrm>
             <a:off x="1693440" y="3154320"/>
-            <a:ext cx="197280" cy="196920"/>
+            <a:ext cx="196920" cy="196560"/>
           </a:xfrm>
           <a:prstGeom prst="rect">
             <a:avLst/>
@@ -34343,7 +34343,7 @@
         <p:spPr>
           <a:xfrm>
             <a:off x="1366200" y="3154320"/>
-            <a:ext cx="196920" cy="196920"/>
+            <a:ext cx="196560" cy="196560"/>
           </a:xfrm>
           <a:prstGeom prst="rect">
             <a:avLst/>
@@ -34366,7 +34366,7 @@
         <p:spPr>
           <a:xfrm>
             <a:off x="1038960" y="3154320"/>
-            <a:ext cx="197280" cy="196920"/>
+            <a:ext cx="196920" cy="196560"/>
           </a:xfrm>
           <a:prstGeom prst="rect">
             <a:avLst/>
@@ -34389,7 +34389,7 @@
         <p:spPr>
           <a:xfrm>
             <a:off x="711000" y="3154320"/>
-            <a:ext cx="197280" cy="196920"/>
+            <a:ext cx="196920" cy="196560"/>
           </a:xfrm>
           <a:prstGeom prst="rect">
             <a:avLst/>
@@ -34412,7 +34412,7 @@
         <p:spPr>
           <a:xfrm>
             <a:off x="383400" y="3154320"/>
-            <a:ext cx="197280" cy="196920"/>
+            <a:ext cx="196920" cy="196560"/>
           </a:xfrm>
           <a:prstGeom prst="rect">
             <a:avLst/>
@@ -34431,7 +34431,7 @@
         <p:spPr>
           <a:xfrm>
             <a:off x="383040" y="2916360"/>
-            <a:ext cx="1197000" cy="255240"/>
+            <a:ext cx="1196640" cy="255240"/>
           </a:xfrm>
           <a:prstGeom prst="rect">
             <a:avLst/>
@@ -34512,7 +34512,7 @@
         <p:spPr>
           <a:xfrm>
             <a:off x="2021760" y="4116960"/>
-            <a:ext cx="196920" cy="196920"/>
+            <a:ext cx="196560" cy="196560"/>
           </a:xfrm>
           <a:prstGeom prst="rect">
             <a:avLst/>
@@ -34535,7 +34535,7 @@
         <p:spPr>
           <a:xfrm>
             <a:off x="1693440" y="4116960"/>
-            <a:ext cx="197280" cy="196920"/>
+            <a:ext cx="196920" cy="196560"/>
           </a:xfrm>
           <a:prstGeom prst="rect">
             <a:avLst/>
@@ -34558,7 +34558,7 @@
         <p:spPr>
           <a:xfrm>
             <a:off x="1366200" y="4116960"/>
-            <a:ext cx="196920" cy="196920"/>
+            <a:ext cx="196560" cy="196560"/>
           </a:xfrm>
           <a:prstGeom prst="rect">
             <a:avLst/>
@@ -34581,7 +34581,7 @@
         <p:spPr>
           <a:xfrm>
             <a:off x="1038960" y="4116960"/>
-            <a:ext cx="197280" cy="196920"/>
+            <a:ext cx="196920" cy="196560"/>
           </a:xfrm>
           <a:prstGeom prst="rect">
             <a:avLst/>
@@ -34604,7 +34604,7 @@
         <p:spPr>
           <a:xfrm>
             <a:off x="711000" y="4116960"/>
-            <a:ext cx="197280" cy="196920"/>
+            <a:ext cx="196920" cy="196560"/>
           </a:xfrm>
           <a:prstGeom prst="rect">
             <a:avLst/>
@@ -34627,7 +34627,7 @@
         <p:spPr>
           <a:xfrm>
             <a:off x="383400" y="4116960"/>
-            <a:ext cx="197280" cy="196920"/>
+            <a:ext cx="196920" cy="196560"/>
           </a:xfrm>
           <a:prstGeom prst="rect">
             <a:avLst/>
@@ -34646,7 +34646,7 @@
         <p:spPr>
           <a:xfrm>
             <a:off x="383040" y="3666960"/>
-            <a:ext cx="1704600" cy="468000"/>
+            <a:ext cx="1704240" cy="468000"/>
           </a:xfrm>
           <a:prstGeom prst="rect">
             <a:avLst/>
@@ -34757,7 +34757,7 @@
         <p:spPr>
           <a:xfrm>
             <a:off x="1854360" y="5000760"/>
-            <a:ext cx="197280" cy="197280"/>
+            <a:ext cx="196920" cy="196920"/>
           </a:xfrm>
           <a:prstGeom prst="rect">
             <a:avLst/>
@@ -34780,7 +34780,7 @@
         <p:spPr>
           <a:xfrm>
             <a:off x="1499760" y="5000760"/>
-            <a:ext cx="196920" cy="197280"/>
+            <a:ext cx="196560" cy="196920"/>
           </a:xfrm>
           <a:prstGeom prst="rect">
             <a:avLst/>
@@ -34803,7 +34803,7 @@
         <p:spPr>
           <a:xfrm>
             <a:off x="1144800" y="5000760"/>
-            <a:ext cx="197280" cy="197280"/>
+            <a:ext cx="196920" cy="196920"/>
           </a:xfrm>
           <a:prstGeom prst="rect">
             <a:avLst/>
@@ -34826,7 +34826,7 @@
         <p:spPr>
           <a:xfrm>
             <a:off x="789480" y="5000760"/>
-            <a:ext cx="197280" cy="197280"/>
+            <a:ext cx="196920" cy="196920"/>
           </a:xfrm>
           <a:prstGeom prst="rect">
             <a:avLst/>
@@ -34849,7 +34849,7 @@
         <p:spPr>
           <a:xfrm>
             <a:off x="434880" y="5000760"/>
-            <a:ext cx="197280" cy="197280"/>
+            <a:ext cx="196920" cy="196920"/>
           </a:xfrm>
           <a:prstGeom prst="rect">
             <a:avLst/>
@@ -34868,7 +34868,7 @@
         <p:spPr>
           <a:xfrm>
             <a:off x="432360" y="4755960"/>
-            <a:ext cx="1791360" cy="255240"/>
+            <a:ext cx="1791000" cy="255240"/>
           </a:xfrm>
           <a:prstGeom prst="rect">
             <a:avLst/>
@@ -34945,7 +34945,7 @@
         <p:spPr>
           <a:xfrm>
             <a:off x="7020360" y="3073680"/>
-            <a:ext cx="1438560" cy="894960"/>
+            <a:ext cx="1438200" cy="894960"/>
           </a:xfrm>
           <a:prstGeom prst="rect">
             <a:avLst/>
@@ -35023,7 +35023,7 @@
         <p:spPr>
           <a:xfrm>
             <a:off x="6668280" y="4397760"/>
-            <a:ext cx="2111400" cy="287280"/>
+            <a:ext cx="2111040" cy="286560"/>
           </a:xfrm>
           <a:prstGeom prst="rect">
             <a:avLst/>
@@ -35094,7 +35094,7 @@
         <p:spPr>
           <a:xfrm>
             <a:off x="6408000" y="1105920"/>
-            <a:ext cx="2662560" cy="1859040"/>
+            <a:ext cx="2662200" cy="1858680"/>
           </a:xfrm>
           <a:prstGeom prst="rect">
             <a:avLst/>
@@ -35147,7 +35147,7 @@
         <p:spPr>
           <a:xfrm>
             <a:off x="2057760" y="2264400"/>
-            <a:ext cx="5116320" cy="2205000"/>
+            <a:ext cx="5115960" cy="2204640"/>
           </a:xfrm>
           <a:prstGeom prst="rect">
             <a:avLst/>
@@ -35246,7 +35246,7 @@
         <p:spPr>
           <a:xfrm>
             <a:off x="7700040" y="27000"/>
-            <a:ext cx="221760" cy="226080"/>
+            <a:ext cx="221400" cy="226080"/>
           </a:xfrm>
           <a:prstGeom prst="rect">
             <a:avLst/>
@@ -35333,7 +35333,7 @@
         <p:spPr>
           <a:xfrm>
             <a:off x="801000" y="2312280"/>
-            <a:ext cx="7657560" cy="743400"/>
+            <a:ext cx="7657200" cy="743400"/>
           </a:xfrm>
           <a:prstGeom prst="rect">
             <a:avLst/>
@@ -35430,7 +35430,7 @@
         <p:spPr>
           <a:xfrm>
             <a:off x="801000" y="3809160"/>
-            <a:ext cx="4343040" cy="1218960"/>
+            <a:ext cx="4342680" cy="1218960"/>
           </a:xfrm>
           <a:prstGeom prst="rect">
             <a:avLst/>
@@ -35603,7 +35603,7 @@
         <p:spPr>
           <a:xfrm>
             <a:off x="7700040" y="27000"/>
-            <a:ext cx="123120" cy="226080"/>
+            <a:ext cx="122760" cy="226080"/>
           </a:xfrm>
           <a:prstGeom prst="rect">
             <a:avLst/>
@@ -35694,7 +35694,7 @@
         <p:spPr>
           <a:xfrm>
             <a:off x="536040" y="526320"/>
-            <a:ext cx="7740000" cy="965520"/>
+            <a:ext cx="7739640" cy="965160"/>
           </a:xfrm>
           <a:prstGeom prst="rect">
             <a:avLst/>
@@ -35802,7 +35802,7 @@
         <p:spPr>
           <a:xfrm>
             <a:off x="536040" y="1322280"/>
-            <a:ext cx="7916760" cy="3543840"/>
+            <a:ext cx="7916400" cy="3543840"/>
           </a:xfrm>
           <a:prstGeom prst="rect">
             <a:avLst/>
@@ -35911,7 +35911,7 @@
               <a:t>disponibles</a:t>
             </a:r>
             <a:r>
-              <a:rPr b="0" lang="fr-FR" sz="2400" spc="21" strike="noStrike">
+              <a:rPr b="0" lang="fr-FR" sz="2400" spc="18" strike="noStrike">
                 <a:solidFill>
                   <a:srgbClr val="292934"/>
                 </a:solidFill>
@@ -37038,7 +37038,7 @@
         <p:spPr>
           <a:xfrm>
             <a:off x="7255800" y="625320"/>
-            <a:ext cx="1581840" cy="458640"/>
+            <a:ext cx="1581480" cy="458280"/>
           </a:xfrm>
           <a:prstGeom prst="rect">
             <a:avLst/>
@@ -37057,7 +37057,7 @@
         <p:spPr>
           <a:xfrm>
             <a:off x="7700040" y="27000"/>
-            <a:ext cx="123120" cy="226080"/>
+            <a:ext cx="122760" cy="226080"/>
           </a:xfrm>
           <a:prstGeom prst="rect">
             <a:avLst/>
@@ -37148,7 +37148,7 @@
         <p:spPr>
           <a:xfrm>
             <a:off x="536040" y="526320"/>
-            <a:ext cx="7740000" cy="965520"/>
+            <a:ext cx="7739640" cy="965160"/>
           </a:xfrm>
           <a:prstGeom prst="rect">
             <a:avLst/>
@@ -37256,7 +37256,7 @@
         <p:spPr>
           <a:xfrm>
             <a:off x="536040" y="1286280"/>
-            <a:ext cx="8053920" cy="4007160"/>
+            <a:ext cx="8053560" cy="4007160"/>
           </a:xfrm>
           <a:prstGeom prst="rect">
             <a:avLst/>
@@ -38197,7 +38197,7 @@
         <p:spPr>
           <a:xfrm>
             <a:off x="7700040" y="27000"/>
-            <a:ext cx="123120" cy="226080"/>
+            <a:ext cx="122760" cy="226080"/>
           </a:xfrm>
           <a:prstGeom prst="rect">
             <a:avLst/>
@@ -38258,7 +38258,7 @@
         <p:spPr>
           <a:xfrm>
             <a:off x="7255800" y="625320"/>
-            <a:ext cx="1581840" cy="458640"/>
+            <a:ext cx="1581480" cy="458280"/>
           </a:xfrm>
           <a:prstGeom prst="rect">
             <a:avLst/>
@@ -38307,7 +38307,7 @@
         <p:spPr>
           <a:xfrm>
             <a:off x="801000" y="2264400"/>
-            <a:ext cx="7413840" cy="1474560"/>
+            <a:ext cx="7413480" cy="1474560"/>
           </a:xfrm>
           <a:prstGeom prst="rect">
             <a:avLst/>
@@ -38474,7 +38474,7 @@
         <p:spPr>
           <a:xfrm>
             <a:off x="801000" y="3809160"/>
-            <a:ext cx="2749680" cy="1231920"/>
+            <a:ext cx="2749320" cy="1231920"/>
           </a:xfrm>
           <a:prstGeom prst="rect">
             <a:avLst/>
@@ -38577,7 +38577,7 @@
         <p:spPr>
           <a:xfrm>
             <a:off x="7700040" y="27000"/>
-            <a:ext cx="123120" cy="226080"/>
+            <a:ext cx="122760" cy="226080"/>
           </a:xfrm>
           <a:prstGeom prst="rect">
             <a:avLst/>
@@ -38668,7 +38668,7 @@
         <p:spPr>
           <a:xfrm>
             <a:off x="536040" y="526320"/>
-            <a:ext cx="7740000" cy="965160"/>
+            <a:ext cx="7739640" cy="964800"/>
           </a:xfrm>
           <a:prstGeom prst="rect">
             <a:avLst/>
@@ -38722,7 +38722,7 @@
         <p:spPr>
           <a:xfrm>
             <a:off x="258120" y="1308960"/>
-            <a:ext cx="6373080" cy="2797560"/>
+            <a:ext cx="6372720" cy="2797560"/>
           </a:xfrm>
           <a:prstGeom prst="rect">
             <a:avLst/>
@@ -39958,7 +39958,7 @@
         <p:spPr>
           <a:xfrm>
             <a:off x="7700040" y="27000"/>
-            <a:ext cx="123120" cy="226080"/>
+            <a:ext cx="122760" cy="226080"/>
           </a:xfrm>
           <a:prstGeom prst="rect">
             <a:avLst/>
@@ -40019,7 +40019,7 @@
         <p:spPr>
           <a:xfrm>
             <a:off x="7568640" y="625320"/>
-            <a:ext cx="1466280" cy="2631960"/>
+            <a:ext cx="1465920" cy="2631600"/>
           </a:xfrm>
           <a:prstGeom prst="rect">
             <a:avLst/>
@@ -40068,9 +40068,9 @@
         <p:grpSpPr>
           <a:xfrm>
             <a:off x="6732360" y="3721680"/>
-            <a:ext cx="2251800" cy="1942560"/>
+            <a:ext cx="2251440" cy="1942200"/>
             <a:chOff x="6732360" y="3721680"/>
-            <a:chExt cx="2251800" cy="1942560"/>
+            <a:chExt cx="2251440" cy="1942200"/>
           </a:xfrm>
         </p:grpSpPr>
         <p:sp>
@@ -40082,15 +40082,15 @@
           <p:spPr>
             <a:xfrm>
               <a:off x="6732360" y="3721680"/>
-              <a:ext cx="2251800" cy="1942560"/>
+              <a:ext cx="2251440" cy="1942200"/>
             </a:xfrm>
             <a:custGeom>
               <a:avLst/>
               <a:gdLst>
-                <a:gd name="textAreaLeft" fmla="*/ 0 w 2251800"/>
-                <a:gd name="textAreaRight" fmla="*/ 2253600 w 2251800"/>
-                <a:gd name="textAreaTop" fmla="*/ 0 h 1942560"/>
-                <a:gd name="textAreaBottom" fmla="*/ 1944360 h 1942560"/>
+                <a:gd name="textAreaLeft" fmla="*/ 0 w 2251440"/>
+                <a:gd name="textAreaRight" fmla="*/ 2253600 w 2251440"/>
+                <a:gd name="textAreaTop" fmla="*/ 0 h 1942200"/>
+                <a:gd name="textAreaBottom" fmla="*/ 1944360 h 1942200"/>
               </a:gdLst>
               <a:ahLst/>
               <a:rect l="textAreaLeft" t="textAreaTop" r="textAreaRight" b="textAreaBottom"/>
@@ -40157,15 +40157,15 @@
           <p:spPr>
             <a:xfrm>
               <a:off x="6732360" y="3721680"/>
-              <a:ext cx="2251800" cy="1942560"/>
+              <a:ext cx="2251440" cy="1942200"/>
             </a:xfrm>
             <a:custGeom>
               <a:avLst/>
               <a:gdLst>
-                <a:gd name="textAreaLeft" fmla="*/ 0 w 2251800"/>
-                <a:gd name="textAreaRight" fmla="*/ 2253600 w 2251800"/>
-                <a:gd name="textAreaTop" fmla="*/ 0 h 1942560"/>
-                <a:gd name="textAreaBottom" fmla="*/ 1944360 h 1942560"/>
+                <a:gd name="textAreaLeft" fmla="*/ 0 w 2251440"/>
+                <a:gd name="textAreaRight" fmla="*/ 2253600 w 2251440"/>
+                <a:gd name="textAreaTop" fmla="*/ 0 h 1942200"/>
+                <a:gd name="textAreaBottom" fmla="*/ 1944360 h 1942200"/>
               </a:gdLst>
               <a:ahLst/>
               <a:rect l="textAreaLeft" t="textAreaTop" r="textAreaRight" b="textAreaBottom"/>
@@ -40233,15 +40233,15 @@
           <p:spPr>
             <a:xfrm>
               <a:off x="7668720" y="3794040"/>
-              <a:ext cx="1186920" cy="848520"/>
+              <a:ext cx="1186560" cy="848160"/>
             </a:xfrm>
             <a:custGeom>
               <a:avLst/>
               <a:gdLst>
-                <a:gd name="textAreaLeft" fmla="*/ 0 w 1186920"/>
-                <a:gd name="textAreaRight" fmla="*/ 1188720 w 1186920"/>
-                <a:gd name="textAreaTop" fmla="*/ 0 h 848520"/>
-                <a:gd name="textAreaBottom" fmla="*/ 850320 h 848520"/>
+                <a:gd name="textAreaLeft" fmla="*/ 0 w 1186560"/>
+                <a:gd name="textAreaRight" fmla="*/ 1188720 w 1186560"/>
+                <a:gd name="textAreaTop" fmla="*/ 0 h 848160"/>
+                <a:gd name="textAreaBottom" fmla="*/ 850320 h 848160"/>
               </a:gdLst>
               <a:ahLst/>
               <a:rect l="textAreaLeft" t="textAreaTop" r="textAreaRight" b="textAreaBottom"/>
@@ -40370,15 +40370,15 @@
           <p:spPr>
             <a:xfrm>
               <a:off x="7668720" y="3794040"/>
-              <a:ext cx="1186920" cy="848520"/>
+              <a:ext cx="1186560" cy="848160"/>
             </a:xfrm>
             <a:custGeom>
               <a:avLst/>
               <a:gdLst>
-                <a:gd name="textAreaLeft" fmla="*/ 0 w 1186920"/>
-                <a:gd name="textAreaRight" fmla="*/ 1188720 w 1186920"/>
-                <a:gd name="textAreaTop" fmla="*/ 0 h 848520"/>
-                <a:gd name="textAreaBottom" fmla="*/ 850320 h 848520"/>
+                <a:gd name="textAreaLeft" fmla="*/ 0 w 1186560"/>
+                <a:gd name="textAreaRight" fmla="*/ 1188720 w 1186560"/>
+                <a:gd name="textAreaTop" fmla="*/ 0 h 848160"/>
+                <a:gd name="textAreaBottom" fmla="*/ 850320 h 848160"/>
               </a:gdLst>
               <a:ahLst/>
               <a:rect l="textAreaLeft" t="textAreaTop" r="textAreaRight" b="textAreaBottom"/>
@@ -40511,7 +40511,7 @@
         <p:spPr>
           <a:xfrm>
             <a:off x="536040" y="526320"/>
-            <a:ext cx="8463240" cy="1230120"/>
+            <a:ext cx="8462880" cy="1229760"/>
           </a:xfrm>
           <a:prstGeom prst="rect">
             <a:avLst/>
@@ -40583,7 +40583,7 @@
         <p:spPr>
           <a:xfrm>
             <a:off x="536040" y="1117800"/>
-            <a:ext cx="6550200" cy="2020680"/>
+            <a:ext cx="6549840" cy="2020680"/>
           </a:xfrm>
           <a:prstGeom prst="rect">
             <a:avLst/>
@@ -41900,7 +41900,7 @@
         <p:spPr>
           <a:xfrm>
             <a:off x="536040" y="3120480"/>
-            <a:ext cx="5221080" cy="1437480"/>
+            <a:ext cx="5220720" cy="1437480"/>
           </a:xfrm>
           <a:prstGeom prst="rect">
             <a:avLst/>
@@ -43323,7 +43323,7 @@
         <p:spPr>
           <a:xfrm>
             <a:off x="536040" y="4612320"/>
-            <a:ext cx="3053160" cy="194760"/>
+            <a:ext cx="3052800" cy="194760"/>
           </a:xfrm>
           <a:prstGeom prst="rect">
             <a:avLst/>
@@ -43440,7 +43440,7 @@
         <p:spPr>
           <a:xfrm>
             <a:off x="7700040" y="27000"/>
-            <a:ext cx="123120" cy="226080"/>
+            <a:ext cx="122760" cy="226080"/>
           </a:xfrm>
           <a:prstGeom prst="rect">
             <a:avLst/>
@@ -43501,7 +43501,7 @@
         <p:spPr>
           <a:xfrm>
             <a:off x="5393520" y="5017680"/>
-            <a:ext cx="833040" cy="658080"/>
+            <a:ext cx="832680" cy="657720"/>
           </a:xfrm>
           <a:prstGeom prst="rect">
             <a:avLst/>
@@ -43520,9 +43520,9 @@
         <p:grpSpPr>
           <a:xfrm>
             <a:off x="4025160" y="5038920"/>
-            <a:ext cx="1294560" cy="628200"/>
+            <a:ext cx="1294200" cy="627840"/>
             <a:chOff x="4025160" y="5038920"/>
-            <a:chExt cx="1294560" cy="628200"/>
+            <a:chExt cx="1294200" cy="627840"/>
           </a:xfrm>
         </p:grpSpPr>
         <p:pic>
@@ -43538,7 +43538,7 @@
           <p:spPr>
             <a:xfrm>
               <a:off x="4025160" y="5038920"/>
-              <a:ext cx="893520" cy="628200"/>
+              <a:ext cx="893160" cy="627840"/>
             </a:xfrm>
             <a:prstGeom prst="rect">
               <a:avLst/>
@@ -43557,15 +43557,15 @@
           <p:spPr>
             <a:xfrm>
               <a:off x="4961520" y="5292360"/>
-              <a:ext cx="358200" cy="142200"/>
+              <a:ext cx="357840" cy="141840"/>
             </a:xfrm>
             <a:custGeom>
               <a:avLst/>
               <a:gdLst>
-                <a:gd name="textAreaLeft" fmla="*/ 0 w 358200"/>
-                <a:gd name="textAreaRight" fmla="*/ 360000 w 358200"/>
-                <a:gd name="textAreaTop" fmla="*/ 0 h 142200"/>
-                <a:gd name="textAreaBottom" fmla="*/ 144000 h 142200"/>
+                <a:gd name="textAreaLeft" fmla="*/ 0 w 357840"/>
+                <a:gd name="textAreaRight" fmla="*/ 360000 w 357840"/>
+                <a:gd name="textAreaTop" fmla="*/ 0 h 141840"/>
+                <a:gd name="textAreaBottom" fmla="*/ 144000 h 141840"/>
               </a:gdLst>
               <a:ahLst/>
               <a:rect l="textAreaLeft" t="textAreaTop" r="textAreaRight" b="textAreaBottom"/>
@@ -43641,15 +43641,15 @@
           <p:spPr>
             <a:xfrm>
               <a:off x="4961520" y="5292360"/>
-              <a:ext cx="358200" cy="142200"/>
+              <a:ext cx="357840" cy="141840"/>
             </a:xfrm>
             <a:custGeom>
               <a:avLst/>
               <a:gdLst>
-                <a:gd name="textAreaLeft" fmla="*/ 0 w 358200"/>
-                <a:gd name="textAreaRight" fmla="*/ 360000 w 358200"/>
-                <a:gd name="textAreaTop" fmla="*/ 0 h 142200"/>
-                <a:gd name="textAreaBottom" fmla="*/ 144000 h 142200"/>
+                <a:gd name="textAreaLeft" fmla="*/ 0 w 357840"/>
+                <a:gd name="textAreaRight" fmla="*/ 360000 w 357840"/>
+                <a:gd name="textAreaTop" fmla="*/ 0 h 141840"/>
+                <a:gd name="textAreaBottom" fmla="*/ 144000 h 141840"/>
               </a:gdLst>
               <a:ahLst/>
               <a:rect l="textAreaLeft" t="textAreaTop" r="textAreaRight" b="textAreaBottom"/>
@@ -43727,7 +43727,7 @@
         <p:spPr>
           <a:xfrm>
             <a:off x="7719120" y="3804120"/>
-            <a:ext cx="1050480" cy="696240"/>
+            <a:ext cx="1050120" cy="696240"/>
           </a:xfrm>
           <a:prstGeom prst="rect">
             <a:avLst/>
@@ -43935,9 +43935,9 @@
         <p:grpSpPr>
           <a:xfrm>
             <a:off x="6876360" y="3794040"/>
-            <a:ext cx="790560" cy="848520"/>
+            <a:ext cx="790200" cy="848160"/>
             <a:chOff x="6876360" y="3794040"/>
-            <a:chExt cx="790560" cy="848520"/>
+            <a:chExt cx="790200" cy="848160"/>
           </a:xfrm>
         </p:grpSpPr>
         <p:sp>
@@ -43949,15 +43949,15 @@
           <p:spPr>
             <a:xfrm>
               <a:off x="6876360" y="3794040"/>
-              <a:ext cx="790560" cy="848520"/>
+              <a:ext cx="790200" cy="848160"/>
             </a:xfrm>
             <a:custGeom>
               <a:avLst/>
               <a:gdLst>
-                <a:gd name="textAreaLeft" fmla="*/ 0 w 790560"/>
-                <a:gd name="textAreaRight" fmla="*/ 792360 w 790560"/>
-                <a:gd name="textAreaTop" fmla="*/ 0 h 848520"/>
-                <a:gd name="textAreaBottom" fmla="*/ 850320 h 848520"/>
+                <a:gd name="textAreaLeft" fmla="*/ 0 w 790200"/>
+                <a:gd name="textAreaRight" fmla="*/ 792360 w 790200"/>
+                <a:gd name="textAreaTop" fmla="*/ 0 h 848160"/>
+                <a:gd name="textAreaBottom" fmla="*/ 850320 h 848160"/>
               </a:gdLst>
               <a:ahLst/>
               <a:rect l="textAreaLeft" t="textAreaTop" r="textAreaRight" b="textAreaBottom"/>
@@ -44084,15 +44084,15 @@
           <p:spPr>
             <a:xfrm>
               <a:off x="6876360" y="3794040"/>
-              <a:ext cx="790560" cy="848520"/>
+              <a:ext cx="790200" cy="848160"/>
             </a:xfrm>
             <a:custGeom>
               <a:avLst/>
               <a:gdLst>
-                <a:gd name="textAreaLeft" fmla="*/ 0 w 790560"/>
-                <a:gd name="textAreaRight" fmla="*/ 792360 w 790560"/>
-                <a:gd name="textAreaTop" fmla="*/ 0 h 848520"/>
-                <a:gd name="textAreaBottom" fmla="*/ 850320 h 848520"/>
+                <a:gd name="textAreaLeft" fmla="*/ 0 w 790200"/>
+                <a:gd name="textAreaRight" fmla="*/ 792360 w 790200"/>
+                <a:gd name="textAreaTop" fmla="*/ 0 h 848160"/>
+                <a:gd name="textAreaBottom" fmla="*/ 850320 h 848160"/>
               </a:gdLst>
               <a:ahLst/>
               <a:rect l="textAreaLeft" t="textAreaTop" r="textAreaRight" b="textAreaBottom"/>
@@ -44221,7 +44221,7 @@
         <p:spPr>
           <a:xfrm>
             <a:off x="7012800" y="3819960"/>
-            <a:ext cx="532800" cy="753480"/>
+            <a:ext cx="532440" cy="753480"/>
           </a:xfrm>
           <a:prstGeom prst="rect">
             <a:avLst/>
@@ -44338,9 +44338,9 @@
         <p:grpSpPr>
           <a:xfrm>
             <a:off x="7668720" y="4728960"/>
-            <a:ext cx="1186920" cy="848520"/>
+            <a:ext cx="1186560" cy="848160"/>
             <a:chOff x="7668720" y="4728960"/>
-            <a:chExt cx="1186920" cy="848520"/>
+            <a:chExt cx="1186560" cy="848160"/>
           </a:xfrm>
         </p:grpSpPr>
         <p:sp>
@@ -44352,15 +44352,15 @@
           <p:spPr>
             <a:xfrm>
               <a:off x="7668720" y="4728960"/>
-              <a:ext cx="1186920" cy="848520"/>
+              <a:ext cx="1186560" cy="848160"/>
             </a:xfrm>
             <a:custGeom>
               <a:avLst/>
               <a:gdLst>
-                <a:gd name="textAreaLeft" fmla="*/ 0 w 1186920"/>
-                <a:gd name="textAreaRight" fmla="*/ 1188720 w 1186920"/>
-                <a:gd name="textAreaTop" fmla="*/ 0 h 848520"/>
-                <a:gd name="textAreaBottom" fmla="*/ 850320 h 848520"/>
+                <a:gd name="textAreaLeft" fmla="*/ 0 w 1186560"/>
+                <a:gd name="textAreaRight" fmla="*/ 1188720 w 1186560"/>
+                <a:gd name="textAreaTop" fmla="*/ 0 h 848160"/>
+                <a:gd name="textAreaBottom" fmla="*/ 850320 h 848160"/>
               </a:gdLst>
               <a:ahLst/>
               <a:rect l="textAreaLeft" t="textAreaTop" r="textAreaRight" b="textAreaBottom"/>
@@ -44489,15 +44489,15 @@
           <p:spPr>
             <a:xfrm>
               <a:off x="7668720" y="4728960"/>
-              <a:ext cx="1186920" cy="848520"/>
+              <a:ext cx="1186560" cy="848160"/>
             </a:xfrm>
             <a:custGeom>
               <a:avLst/>
               <a:gdLst>
-                <a:gd name="textAreaLeft" fmla="*/ 0 w 1186920"/>
-                <a:gd name="textAreaRight" fmla="*/ 1188720 w 1186920"/>
-                <a:gd name="textAreaTop" fmla="*/ 0 h 848520"/>
-                <a:gd name="textAreaBottom" fmla="*/ 850320 h 848520"/>
+                <a:gd name="textAreaLeft" fmla="*/ 0 w 1186560"/>
+                <a:gd name="textAreaRight" fmla="*/ 1188720 w 1186560"/>
+                <a:gd name="textAreaTop" fmla="*/ 0 h 848160"/>
+                <a:gd name="textAreaBottom" fmla="*/ 850320 h 848160"/>
               </a:gdLst>
               <a:ahLst/>
               <a:rect l="textAreaLeft" t="textAreaTop" r="textAreaRight" b="textAreaBottom"/>
@@ -44626,7 +44626,7 @@
         <p:spPr>
           <a:xfrm>
             <a:off x="7719120" y="4739040"/>
-            <a:ext cx="1050480" cy="695880"/>
+            <a:ext cx="1050120" cy="695880"/>
           </a:xfrm>
           <a:prstGeom prst="rect">
             <a:avLst/>
@@ -44834,9 +44834,9 @@
         <p:grpSpPr>
           <a:xfrm>
             <a:off x="6876360" y="4728960"/>
-            <a:ext cx="790560" cy="848520"/>
+            <a:ext cx="790200" cy="848160"/>
             <a:chOff x="6876360" y="4728960"/>
-            <a:chExt cx="790560" cy="848520"/>
+            <a:chExt cx="790200" cy="848160"/>
           </a:xfrm>
         </p:grpSpPr>
         <p:sp>
@@ -44848,15 +44848,15 @@
           <p:spPr>
             <a:xfrm>
               <a:off x="6876360" y="4728960"/>
-              <a:ext cx="790560" cy="848520"/>
+              <a:ext cx="790200" cy="848160"/>
             </a:xfrm>
             <a:custGeom>
               <a:avLst/>
               <a:gdLst>
-                <a:gd name="textAreaLeft" fmla="*/ 0 w 790560"/>
-                <a:gd name="textAreaRight" fmla="*/ 792360 w 790560"/>
-                <a:gd name="textAreaTop" fmla="*/ 0 h 848520"/>
-                <a:gd name="textAreaBottom" fmla="*/ 850320 h 848520"/>
+                <a:gd name="textAreaLeft" fmla="*/ 0 w 790200"/>
+                <a:gd name="textAreaRight" fmla="*/ 792360 w 790200"/>
+                <a:gd name="textAreaTop" fmla="*/ 0 h 848160"/>
+                <a:gd name="textAreaBottom" fmla="*/ 850320 h 848160"/>
               </a:gdLst>
               <a:ahLst/>
               <a:rect l="textAreaLeft" t="textAreaTop" r="textAreaRight" b="textAreaBottom"/>
@@ -44983,15 +44983,15 @@
           <p:spPr>
             <a:xfrm>
               <a:off x="6876360" y="4728960"/>
-              <a:ext cx="790560" cy="848520"/>
+              <a:ext cx="790200" cy="848160"/>
             </a:xfrm>
             <a:custGeom>
               <a:avLst/>
               <a:gdLst>
-                <a:gd name="textAreaLeft" fmla="*/ 0 w 790560"/>
-                <a:gd name="textAreaRight" fmla="*/ 792360 w 790560"/>
-                <a:gd name="textAreaTop" fmla="*/ 0 h 848520"/>
-                <a:gd name="textAreaBottom" fmla="*/ 850320 h 848520"/>
+                <a:gd name="textAreaLeft" fmla="*/ 0 w 790200"/>
+                <a:gd name="textAreaRight" fmla="*/ 792360 w 790200"/>
+                <a:gd name="textAreaTop" fmla="*/ 0 h 848160"/>
+                <a:gd name="textAreaBottom" fmla="*/ 850320 h 848160"/>
               </a:gdLst>
               <a:ahLst/>
               <a:rect l="textAreaLeft" t="textAreaTop" r="textAreaRight" b="textAreaBottom"/>
@@ -45120,7 +45120,7 @@
         <p:spPr>
           <a:xfrm>
             <a:off x="7012800" y="4755240"/>
-            <a:ext cx="532800" cy="759960"/>
+            <a:ext cx="532440" cy="759960"/>
           </a:xfrm>
           <a:prstGeom prst="rect">
             <a:avLst/>
@@ -45267,15 +45267,15 @@
         <p:spPr>
           <a:xfrm>
             <a:off x="0" y="0"/>
-            <a:ext cx="9142200" cy="303120"/>
+            <a:ext cx="9141840" cy="302760"/>
           </a:xfrm>
           <a:custGeom>
             <a:avLst/>
             <a:gdLst>
-              <a:gd name="textAreaLeft" fmla="*/ 0 w 9142200"/>
-              <a:gd name="textAreaRight" fmla="*/ 9144000 w 9142200"/>
-              <a:gd name="textAreaTop" fmla="*/ 0 h 303120"/>
-              <a:gd name="textAreaBottom" fmla="*/ 304920 h 303120"/>
+              <a:gd name="textAreaLeft" fmla="*/ 0 w 9141840"/>
+              <a:gd name="textAreaRight" fmla="*/ 9144000 w 9141840"/>
+              <a:gd name="textAreaTop" fmla="*/ 0 h 302760"/>
+              <a:gd name="textAreaBottom" fmla="*/ 304920 h 302760"/>
             </a:gdLst>
             <a:ahLst/>
             <a:rect l="textAreaLeft" t="textAreaTop" r="textAreaRight" b="textAreaBottom"/>
@@ -45346,7 +45346,7 @@
         <p:spPr>
           <a:xfrm>
             <a:off x="107280" y="347040"/>
-            <a:ext cx="2441520" cy="965160"/>
+            <a:ext cx="2441160" cy="964800"/>
           </a:xfrm>
           <a:prstGeom prst="rect">
             <a:avLst/>
@@ -45400,7 +45400,7 @@
         <p:spPr>
           <a:xfrm>
             <a:off x="7700040" y="27000"/>
-            <a:ext cx="123120" cy="226080"/>
+            <a:ext cx="122760" cy="226080"/>
           </a:xfrm>
           <a:prstGeom prst="rect">
             <a:avLst/>
@@ -45461,7 +45461,7 @@
         <p:spPr>
           <a:xfrm>
             <a:off x="251640" y="878040"/>
-            <a:ext cx="4265640" cy="2235960"/>
+            <a:ext cx="4265280" cy="2235600"/>
           </a:xfrm>
           <a:prstGeom prst="rect">
             <a:avLst/>
@@ -45484,7 +45484,7 @@
         <p:spPr>
           <a:xfrm>
             <a:off x="370080" y="3210120"/>
-            <a:ext cx="4111920" cy="2162880"/>
+            <a:ext cx="4111560" cy="2162520"/>
           </a:xfrm>
           <a:prstGeom prst="rect">
             <a:avLst/>
@@ -45507,7 +45507,7 @@
         <p:spPr>
           <a:xfrm>
             <a:off x="4880520" y="918720"/>
-            <a:ext cx="4050720" cy="2179440"/>
+            <a:ext cx="4050360" cy="2179080"/>
           </a:xfrm>
           <a:prstGeom prst="rect">
             <a:avLst/>
@@ -45530,7 +45530,7 @@
         <p:spPr>
           <a:xfrm>
             <a:off x="4808520" y="3300480"/>
-            <a:ext cx="4119120" cy="2166840"/>
+            <a:ext cx="4118760" cy="2166480"/>
           </a:xfrm>
           <a:prstGeom prst="rect">
             <a:avLst/>
